--- a/public/lessons/year-6-maths/spring/week-19/scale-recipes/teaching-powerpoint-v1.pptx
+++ b/public/lessons/year-6-maths/spring/week-19/scale-recipes/teaching-powerpoint-v1.pptx
@@ -2,24 +2,24 @@
 <file path=ppt/presentation.xml><?xml version="1.0" encoding="utf-8"?>
 <p:presentation xmlns:p="http://schemas.openxmlformats.org/presentationml/2006/main">
   <p:sldMasterIdLst>
-    <p:sldMasterId xmlns:r="http://schemas.openxmlformats.org/officeDocument/2006/relationships" id="2147483648" r:id="R2e9d0a759ff14e1c"/>
+    <p:sldMasterId xmlns:r="http://schemas.openxmlformats.org/officeDocument/2006/relationships" id="2147483648" r:id="Ra69f1f8f0688443c"/>
   </p:sldMasterIdLst>
   <p:notesMasterIdLst>
-    <p:notesMasterId xmlns:r="http://schemas.openxmlformats.org/officeDocument/2006/relationships" r:id="Rd420226832524ec7"/>
+    <p:notesMasterId xmlns:r="http://schemas.openxmlformats.org/officeDocument/2006/relationships" r:id="R069a36b3148c40bf"/>
   </p:notesMasterIdLst>
   <p:sldIdLst>
-    <p:sldId xmlns:r="http://schemas.openxmlformats.org/officeDocument/2006/relationships" id="256" r:id="R7d25f894f28d41d0"/>
-    <p:sldId xmlns:r="http://schemas.openxmlformats.org/officeDocument/2006/relationships" id="257" r:id="Rab38c147197843a8"/>
-    <p:sldId xmlns:r="http://schemas.openxmlformats.org/officeDocument/2006/relationships" id="258" r:id="Rf6b294f10aa94565"/>
-    <p:sldId xmlns:r="http://schemas.openxmlformats.org/officeDocument/2006/relationships" id="259" r:id="Rf3c4e85eb6614bef"/>
-    <p:sldId xmlns:r="http://schemas.openxmlformats.org/officeDocument/2006/relationships" id="260" r:id="R89f15ed670d641ff"/>
-    <p:sldId xmlns:r="http://schemas.openxmlformats.org/officeDocument/2006/relationships" id="261" r:id="R558b0d6a65c44ecb"/>
-    <p:sldId xmlns:r="http://schemas.openxmlformats.org/officeDocument/2006/relationships" id="262" r:id="R8b3468df8dc5492d"/>
-    <p:sldId xmlns:r="http://schemas.openxmlformats.org/officeDocument/2006/relationships" id="263" r:id="Rfcccb78d4b3f4637"/>
-    <p:sldId xmlns:r="http://schemas.openxmlformats.org/officeDocument/2006/relationships" id="264" r:id="R545732102f52460f"/>
-    <p:sldId xmlns:r="http://schemas.openxmlformats.org/officeDocument/2006/relationships" id="265" r:id="R2b5078baad354a92"/>
-    <p:sldId xmlns:r="http://schemas.openxmlformats.org/officeDocument/2006/relationships" id="266" r:id="R079f767c28064a5f"/>
-    <p:sldId xmlns:r="http://schemas.openxmlformats.org/officeDocument/2006/relationships" id="267" r:id="R9ed076a6db51447c"/>
+    <p:sldId xmlns:r="http://schemas.openxmlformats.org/officeDocument/2006/relationships" id="256" r:id="Reca14486877541e7"/>
+    <p:sldId xmlns:r="http://schemas.openxmlformats.org/officeDocument/2006/relationships" id="257" r:id="Rad32fe0a476e438e"/>
+    <p:sldId xmlns:r="http://schemas.openxmlformats.org/officeDocument/2006/relationships" id="258" r:id="R7cee87f07eda4f0f"/>
+    <p:sldId xmlns:r="http://schemas.openxmlformats.org/officeDocument/2006/relationships" id="259" r:id="R8b899aabab114476"/>
+    <p:sldId xmlns:r="http://schemas.openxmlformats.org/officeDocument/2006/relationships" id="260" r:id="R93709ac4eb1b42c1"/>
+    <p:sldId xmlns:r="http://schemas.openxmlformats.org/officeDocument/2006/relationships" id="261" r:id="R8c094657fccc4600"/>
+    <p:sldId xmlns:r="http://schemas.openxmlformats.org/officeDocument/2006/relationships" id="262" r:id="R68ce0eb96554410d"/>
+    <p:sldId xmlns:r="http://schemas.openxmlformats.org/officeDocument/2006/relationships" id="263" r:id="Rfe67ba2f6c7a4a26"/>
+    <p:sldId xmlns:r="http://schemas.openxmlformats.org/officeDocument/2006/relationships" id="264" r:id="Rfe5bdf9531c14e76"/>
+    <p:sldId xmlns:r="http://schemas.openxmlformats.org/officeDocument/2006/relationships" id="265" r:id="Rb09b95269b6b4bd5"/>
+    <p:sldId xmlns:r="http://schemas.openxmlformats.org/officeDocument/2006/relationships" id="266" r:id="Rac5fa141986f40ec"/>
+    <p:sldId xmlns:r="http://schemas.openxmlformats.org/officeDocument/2006/relationships" id="267" r:id="R6ab0886862114cd1"/>
   </p:sldIdLst>
   <p:sldSz cx="12192000" cy="6858000"/>
   <p:notesSz cx="6858000" cy="9144000"/>
@@ -873,7 +873,7 @@
           <a:lstStyle xmlns:a="http://schemas.openxmlformats.org/drawingml/2006/main"/>
           <a:p xmlns:a="http://schemas.openxmlformats.org/drawingml/2006/main">
             <a:r>
-              <a:t>I do. Reveal the question, setup and each calculation stage one click at a time. Pupils watch before copying. Model answer: 1,050 g.</a:t>
+              <a:t>I do. Reveal the question, then reveal each mathematical change one click at a time. Point to the numbers and operation that changed before moving to the next line. Final answer: 1,050 g.</a:t>
             </a:r>
           </a:p>
         </p:txBody>
@@ -1291,7 +1291,7 @@
   </p:cSld>
   <p:clrMap bg1="lt1" tx1="dk1" bg2="lt2" tx2="dk2" accent1="accent1" accent2="accent2" accent3="accent3" accent4="accent4" accent5="accent5" accent6="accent6" hlink="hlink" folHlink="folHlink"/>
   <p:sldLayoutIdLst>
-    <p:sldLayoutId xmlns:r="http://schemas.openxmlformats.org/officeDocument/2006/relationships" id="2147483649" r:id="R44a0142676a2419e"/>
+    <p:sldLayoutId xmlns:r="http://schemas.openxmlformats.org/officeDocument/2006/relationships" id="2147483649" r:id="R2b583b2e20934733"/>
   </p:sldLayoutIdLst>
   <p:txStyles>
     <p:titleStyle>
@@ -1842,7 +1842,7 @@
           <p:cNvPr id="12" name="">
             <a:extLst xmlns:a="http://schemas.openxmlformats.org/drawingml/2006/main">
               <a:ext uri="{FF2B5EF4-FFF2-40B4-BE49-F238E27FC236}">
-                <a16:creationId xmlns:a16="http://schemas.microsoft.com/office/drawing/2014/main" id="{5CB8181B-9B49-4231-8A93-38FE2112A278}"/>
+                <a16:creationId xmlns:a16="http://schemas.microsoft.com/office/drawing/2014/main" id="{E39F4C22-AFD7-4865-A5D5-1B5958C80B3D}"/>
               </a:ext>
             </a:extLst>
           </p:cNvPr>
@@ -1874,7 +1874,7 @@
           <p:cNvPr id="2" name="">
             <a:extLst xmlns:a="http://schemas.openxmlformats.org/drawingml/2006/main">
               <a:ext uri="{FF2B5EF4-FFF2-40B4-BE49-F238E27FC236}">
-                <a16:creationId xmlns:a16="http://schemas.microsoft.com/office/drawing/2014/main" id="{60B60747-909E-4DB1-A3BA-4A18BBCBC054}"/>
+                <a16:creationId xmlns:a16="http://schemas.microsoft.com/office/drawing/2014/main" id="{5636F00F-49D4-450D-942C-FEDEC26E3290}"/>
               </a:ext>
             </a:extLst>
           </p:cNvPr>
@@ -1931,7 +1931,7 @@
           <p:cNvPr id="3" name="">
             <a:extLst xmlns:a="http://schemas.openxmlformats.org/drawingml/2006/main">
               <a:ext uri="{FF2B5EF4-FFF2-40B4-BE49-F238E27FC236}">
-                <a16:creationId xmlns:a16="http://schemas.microsoft.com/office/drawing/2014/main" id="{41CE25A8-11D8-4B0C-A8EE-1F94C972A20C}"/>
+                <a16:creationId xmlns:a16="http://schemas.microsoft.com/office/drawing/2014/main" id="{886842DB-C5CD-4128-B86E-ECDF4802A86F}"/>
               </a:ext>
             </a:extLst>
           </p:cNvPr>
@@ -1965,7 +1965,7 @@
           <p:cNvPr id="4" name="">
             <a:extLst xmlns:a="http://schemas.openxmlformats.org/drawingml/2006/main">
               <a:ext uri="{FF2B5EF4-FFF2-40B4-BE49-F238E27FC236}">
-                <a16:creationId xmlns:a16="http://schemas.microsoft.com/office/drawing/2014/main" id="{2CD56D32-1F00-4660-A61E-F42BAFCC5DF1}"/>
+                <a16:creationId xmlns:a16="http://schemas.microsoft.com/office/drawing/2014/main" id="{E16547DD-FF9B-4FB1-9A42-481DF72A1761}"/>
               </a:ext>
             </a:extLst>
           </p:cNvPr>
@@ -2022,7 +2022,7 @@
           <p:cNvPr id="5" name="">
             <a:extLst xmlns:a="http://schemas.openxmlformats.org/drawingml/2006/main">
               <a:ext uri="{FF2B5EF4-FFF2-40B4-BE49-F238E27FC236}">
-                <a16:creationId xmlns:a16="http://schemas.microsoft.com/office/drawing/2014/main" id="{2F8C45C2-1D4B-4608-B293-8C2D93C7C091}"/>
+                <a16:creationId xmlns:a16="http://schemas.microsoft.com/office/drawing/2014/main" id="{648D911C-9475-4F35-BD47-338E00DFB934}"/>
               </a:ext>
             </a:extLst>
           </p:cNvPr>
@@ -2079,7 +2079,7 @@
           <p:cNvPr id="6" name="">
             <a:extLst xmlns:a="http://schemas.openxmlformats.org/drawingml/2006/main">
               <a:ext uri="{FF2B5EF4-FFF2-40B4-BE49-F238E27FC236}">
-                <a16:creationId xmlns:a16="http://schemas.microsoft.com/office/drawing/2014/main" id="{018FCB53-93D0-430A-A26A-13AB787746F4}"/>
+                <a16:creationId xmlns:a16="http://schemas.microsoft.com/office/drawing/2014/main" id="{5727E75E-EE05-4C58-9F34-CAC656323938}"/>
               </a:ext>
             </a:extLst>
           </p:cNvPr>
@@ -2113,7 +2113,7 @@
           <p:cNvPr id="7" name="">
             <a:extLst xmlns:a="http://schemas.openxmlformats.org/drawingml/2006/main">
               <a:ext uri="{FF2B5EF4-FFF2-40B4-BE49-F238E27FC236}">
-                <a16:creationId xmlns:a16="http://schemas.microsoft.com/office/drawing/2014/main" id="{21CCD9E5-EC47-4B44-B42A-B2AB209354EC}"/>
+                <a16:creationId xmlns:a16="http://schemas.microsoft.com/office/drawing/2014/main" id="{15198717-3F2B-47EB-866C-079234403922}"/>
               </a:ext>
             </a:extLst>
           </p:cNvPr>
@@ -2170,7 +2170,7 @@
           <p:cNvPr id="8" name="">
             <a:extLst xmlns:a="http://schemas.openxmlformats.org/drawingml/2006/main">
               <a:ext uri="{FF2B5EF4-FFF2-40B4-BE49-F238E27FC236}">
-                <a16:creationId xmlns:a16="http://schemas.microsoft.com/office/drawing/2014/main" id="{2302F48A-5FB7-4AC6-915E-C4B2327F09E3}"/>
+                <a16:creationId xmlns:a16="http://schemas.microsoft.com/office/drawing/2014/main" id="{54AB6AFF-457E-419C-A235-E969CCD656AD}"/>
               </a:ext>
             </a:extLst>
           </p:cNvPr>
@@ -2227,7 +2227,7 @@
           <p:cNvPr id="9" name="">
             <a:extLst xmlns:a="http://schemas.openxmlformats.org/drawingml/2006/main">
               <a:ext uri="{FF2B5EF4-FFF2-40B4-BE49-F238E27FC236}">
-                <a16:creationId xmlns:a16="http://schemas.microsoft.com/office/drawing/2014/main" id="{75A6FA9E-4747-407D-9346-11FC1A89BA65}"/>
+                <a16:creationId xmlns:a16="http://schemas.microsoft.com/office/drawing/2014/main" id="{08BF3DF4-A8F1-4D20-BD38-CDDE1D1E6C57}"/>
               </a:ext>
             </a:extLst>
           </p:cNvPr>
@@ -2284,7 +2284,7 @@
           <p:cNvPr id="10" name="">
             <a:extLst xmlns:a="http://schemas.openxmlformats.org/drawingml/2006/main">
               <a:ext uri="{FF2B5EF4-FFF2-40B4-BE49-F238E27FC236}">
-                <a16:creationId xmlns:a16="http://schemas.microsoft.com/office/drawing/2014/main" id="{515FE40E-08DA-46AD-9BB6-B75D8BF33598}"/>
+                <a16:creationId xmlns:a16="http://schemas.microsoft.com/office/drawing/2014/main" id="{AB6B616C-B8FB-4C1D-B8C9-48EE2BCD42BB}"/>
               </a:ext>
             </a:extLst>
           </p:cNvPr>
@@ -2341,7 +2341,7 @@
           <p:cNvPr id="11" name="">
             <a:extLst xmlns:a="http://schemas.openxmlformats.org/drawingml/2006/main">
               <a:ext uri="{FF2B5EF4-FFF2-40B4-BE49-F238E27FC236}">
-                <a16:creationId xmlns:a16="http://schemas.microsoft.com/office/drawing/2014/main" id="{BAB9552B-417A-48DA-BEDD-6E4AF1F60558}"/>
+                <a16:creationId xmlns:a16="http://schemas.microsoft.com/office/drawing/2014/main" id="{A0A102A6-7F2B-40AD-8627-E2885B32E4B0}"/>
               </a:ext>
             </a:extLst>
           </p:cNvPr>
@@ -2396,7 +2396,7 @@
     </p:spTree>
     <p:extLst>
       <p:ext uri="{BB962C8B-B14F-4D97-AF65-F5344CB8AC3E}">
-        <p14:creationId xmlns:p14="http://schemas.microsoft.com/office/powerpoint/2010/main" val="305753991"/>
+        <p14:creationId xmlns:p14="http://schemas.microsoft.com/office/powerpoint/2010/main" val="2100265287"/>
       </p:ext>
     </p:extLst>
   </p:cSld>
@@ -2427,7 +2427,7 @@
           <p:cNvPr id="14" name="">
             <a:extLst xmlns:a="http://schemas.openxmlformats.org/drawingml/2006/main">
               <a:ext uri="{FF2B5EF4-FFF2-40B4-BE49-F238E27FC236}">
-                <a16:creationId xmlns:a16="http://schemas.microsoft.com/office/drawing/2014/main" id="{E585D76A-1355-4AA0-BBB7-00E605B4534B}"/>
+                <a16:creationId xmlns:a16="http://schemas.microsoft.com/office/drawing/2014/main" id="{6A1C8919-BCAC-46A0-B6B6-173F7D5BAE7E}"/>
               </a:ext>
             </a:extLst>
           </p:cNvPr>
@@ -2459,7 +2459,7 @@
           <p:cNvPr id="2" name="">
             <a:extLst xmlns:a="http://schemas.openxmlformats.org/drawingml/2006/main">
               <a:ext uri="{FF2B5EF4-FFF2-40B4-BE49-F238E27FC236}">
-                <a16:creationId xmlns:a16="http://schemas.microsoft.com/office/drawing/2014/main" id="{0ED26738-074C-4F2A-A97D-B18471A359DD}"/>
+                <a16:creationId xmlns:a16="http://schemas.microsoft.com/office/drawing/2014/main" id="{A3E881F2-C123-492F-979B-CE12828FD2AE}"/>
               </a:ext>
             </a:extLst>
           </p:cNvPr>
@@ -2516,7 +2516,7 @@
           <p:cNvPr id="3" name="">
             <a:extLst xmlns:a="http://schemas.openxmlformats.org/drawingml/2006/main">
               <a:ext uri="{FF2B5EF4-FFF2-40B4-BE49-F238E27FC236}">
-                <a16:creationId xmlns:a16="http://schemas.microsoft.com/office/drawing/2014/main" id="{19E32A4F-0456-4044-95AB-B7C380B85767}"/>
+                <a16:creationId xmlns:a16="http://schemas.microsoft.com/office/drawing/2014/main" id="{C5EE1479-223A-42A7-9A92-2B2781F8C7C7}"/>
               </a:ext>
             </a:extLst>
           </p:cNvPr>
@@ -2548,7 +2548,7 @@
           <p:cNvPr id="4" name="">
             <a:extLst xmlns:a="http://schemas.openxmlformats.org/drawingml/2006/main">
               <a:ext uri="{FF2B5EF4-FFF2-40B4-BE49-F238E27FC236}">
-                <a16:creationId xmlns:a16="http://schemas.microsoft.com/office/drawing/2014/main" id="{5379236C-091A-4348-89F4-1ECB3CF9854E}"/>
+                <a16:creationId xmlns:a16="http://schemas.microsoft.com/office/drawing/2014/main" id="{8E789E89-59EB-4B5E-A198-41410242EEED}"/>
               </a:ext>
             </a:extLst>
           </p:cNvPr>
@@ -2605,7 +2605,7 @@
           <p:cNvPr id="5" name="">
             <a:extLst xmlns:a="http://schemas.openxmlformats.org/drawingml/2006/main">
               <a:ext uri="{FF2B5EF4-FFF2-40B4-BE49-F238E27FC236}">
-                <a16:creationId xmlns:a16="http://schemas.microsoft.com/office/drawing/2014/main" id="{10082775-8C91-487C-8315-CF0BA50112C8}"/>
+                <a16:creationId xmlns:a16="http://schemas.microsoft.com/office/drawing/2014/main" id="{1CC82D78-35C0-4CA2-9A03-FB35D803A720}"/>
               </a:ext>
             </a:extLst>
           </p:cNvPr>
@@ -2662,7 +2662,7 @@
           <p:cNvPr id="6" name="">
             <a:extLst xmlns:a="http://schemas.openxmlformats.org/drawingml/2006/main">
               <a:ext uri="{FF2B5EF4-FFF2-40B4-BE49-F238E27FC236}">
-                <a16:creationId xmlns:a16="http://schemas.microsoft.com/office/drawing/2014/main" id="{38AB0E34-5765-47D2-A7B0-CC203A07C79D}"/>
+                <a16:creationId xmlns:a16="http://schemas.microsoft.com/office/drawing/2014/main" id="{C16124D6-38D9-40F7-996C-89EF72CDA120}"/>
               </a:ext>
             </a:extLst>
           </p:cNvPr>
@@ -2719,7 +2719,7 @@
           <p:cNvPr id="7" name="">
             <a:extLst xmlns:a="http://schemas.openxmlformats.org/drawingml/2006/main">
               <a:ext uri="{FF2B5EF4-FFF2-40B4-BE49-F238E27FC236}">
-                <a16:creationId xmlns:a16="http://schemas.microsoft.com/office/drawing/2014/main" id="{BA2E60CB-0924-45E9-9ED2-77AA91D54A37}"/>
+                <a16:creationId xmlns:a16="http://schemas.microsoft.com/office/drawing/2014/main" id="{0559FB99-EA7E-400A-816C-CDDFDBED8F86}"/>
               </a:ext>
             </a:extLst>
           </p:cNvPr>
@@ -2751,7 +2751,7 @@
           <p:cNvPr id="8" name="">
             <a:extLst xmlns:a="http://schemas.openxmlformats.org/drawingml/2006/main">
               <a:ext uri="{FF2B5EF4-FFF2-40B4-BE49-F238E27FC236}">
-                <a16:creationId xmlns:a16="http://schemas.microsoft.com/office/drawing/2014/main" id="{9DF6ABBC-7F86-4B45-8EEB-FB21423C68FA}"/>
+                <a16:creationId xmlns:a16="http://schemas.microsoft.com/office/drawing/2014/main" id="{B041F4AD-0D4F-44CF-BBD0-630FF6E88BF9}"/>
               </a:ext>
             </a:extLst>
           </p:cNvPr>
@@ -2808,7 +2808,7 @@
           <p:cNvPr id="9" name="">
             <a:extLst xmlns:a="http://schemas.openxmlformats.org/drawingml/2006/main">
               <a:ext uri="{FF2B5EF4-FFF2-40B4-BE49-F238E27FC236}">
-                <a16:creationId xmlns:a16="http://schemas.microsoft.com/office/drawing/2014/main" id="{CDE9CF1A-B7D8-4468-9D27-251CA9332181}"/>
+                <a16:creationId xmlns:a16="http://schemas.microsoft.com/office/drawing/2014/main" id="{CF46BD1E-8FAA-4783-A6C2-4D34C1B2F840}"/>
               </a:ext>
             </a:extLst>
           </p:cNvPr>
@@ -2865,7 +2865,7 @@
           <p:cNvPr id="10" name="">
             <a:extLst xmlns:a="http://schemas.openxmlformats.org/drawingml/2006/main">
               <a:ext uri="{FF2B5EF4-FFF2-40B4-BE49-F238E27FC236}">
-                <a16:creationId xmlns:a16="http://schemas.microsoft.com/office/drawing/2014/main" id="{E08AB55A-CEB8-45C2-9661-EFA5454E68E4}"/>
+                <a16:creationId xmlns:a16="http://schemas.microsoft.com/office/drawing/2014/main" id="{39EDE7D8-C91C-4B65-8131-3DEAF8700799}"/>
               </a:ext>
             </a:extLst>
           </p:cNvPr>
@@ -2922,7 +2922,7 @@
           <p:cNvPr id="11" name="">
             <a:extLst xmlns:a="http://schemas.openxmlformats.org/drawingml/2006/main">
               <a:ext uri="{FF2B5EF4-FFF2-40B4-BE49-F238E27FC236}">
-                <a16:creationId xmlns:a16="http://schemas.microsoft.com/office/drawing/2014/main" id="{5A4C6744-4C1B-40E5-9BA6-A6F8C136C690}"/>
+                <a16:creationId xmlns:a16="http://schemas.microsoft.com/office/drawing/2014/main" id="{0B5007F0-F15B-4DCF-90C1-618701A196B5}"/>
               </a:ext>
             </a:extLst>
           </p:cNvPr>
@@ -2979,7 +2979,7 @@
           <p:cNvPr id="12" name="">
             <a:extLst xmlns:a="http://schemas.openxmlformats.org/drawingml/2006/main">
               <a:ext uri="{FF2B5EF4-FFF2-40B4-BE49-F238E27FC236}">
-                <a16:creationId xmlns:a16="http://schemas.microsoft.com/office/drawing/2014/main" id="{5327E4A5-E1AE-403D-AF9B-5818B5857B22}"/>
+                <a16:creationId xmlns:a16="http://schemas.microsoft.com/office/drawing/2014/main" id="{420AAB0B-284E-4C46-8E21-96416D49D69A}"/>
               </a:ext>
             </a:extLst>
           </p:cNvPr>
@@ -3036,7 +3036,7 @@
           <p:cNvPr id="13" name="">
             <a:extLst xmlns:a="http://schemas.openxmlformats.org/drawingml/2006/main">
               <a:ext uri="{FF2B5EF4-FFF2-40B4-BE49-F238E27FC236}">
-                <a16:creationId xmlns:a16="http://schemas.microsoft.com/office/drawing/2014/main" id="{7BB27A5D-BEB6-463C-9C09-5D79E8B65D61}"/>
+                <a16:creationId xmlns:a16="http://schemas.microsoft.com/office/drawing/2014/main" id="{FE3060DA-2F45-40C9-AAEB-E8700C3468FB}"/>
               </a:ext>
             </a:extLst>
           </p:cNvPr>
@@ -3091,7 +3091,7 @@
     </p:spTree>
     <p:extLst>
       <p:ext uri="{BB962C8B-B14F-4D97-AF65-F5344CB8AC3E}">
-        <p14:creationId xmlns:p14="http://schemas.microsoft.com/office/powerpoint/2010/main" val="1424790625"/>
+        <p14:creationId xmlns:p14="http://schemas.microsoft.com/office/powerpoint/2010/main" val="1320175252"/>
       </p:ext>
     </p:extLst>
   </p:cSld>
@@ -3292,7 +3292,7 @@
           <p:cNvPr id="19" name="">
             <a:extLst xmlns:a="http://schemas.openxmlformats.org/drawingml/2006/main">
               <a:ext uri="{FF2B5EF4-FFF2-40B4-BE49-F238E27FC236}">
-                <a16:creationId xmlns:a16="http://schemas.microsoft.com/office/drawing/2014/main" id="{8CDAA5FA-ADD0-4E3A-96BE-E0C9AF0EBC2D}"/>
+                <a16:creationId xmlns:a16="http://schemas.microsoft.com/office/drawing/2014/main" id="{7E158B07-B34F-4571-BE15-34CF1641CFBC}"/>
               </a:ext>
             </a:extLst>
           </p:cNvPr>
@@ -3324,7 +3324,7 @@
           <p:cNvPr id="2" name="">
             <a:extLst xmlns:a="http://schemas.openxmlformats.org/drawingml/2006/main">
               <a:ext uri="{FF2B5EF4-FFF2-40B4-BE49-F238E27FC236}">
-                <a16:creationId xmlns:a16="http://schemas.microsoft.com/office/drawing/2014/main" id="{70403DAB-F536-46E2-B031-1C97EAF24D80}"/>
+                <a16:creationId xmlns:a16="http://schemas.microsoft.com/office/drawing/2014/main" id="{52B6E1C6-44DC-46B4-9D73-242F7E4301E2}"/>
               </a:ext>
             </a:extLst>
           </p:cNvPr>
@@ -3381,7 +3381,7 @@
           <p:cNvPr id="3" name="">
             <a:extLst xmlns:a="http://schemas.openxmlformats.org/drawingml/2006/main">
               <a:ext uri="{FF2B5EF4-FFF2-40B4-BE49-F238E27FC236}">
-                <a16:creationId xmlns:a16="http://schemas.microsoft.com/office/drawing/2014/main" id="{076988C1-07CE-4CC9-AA51-45C7C48724BC}"/>
+                <a16:creationId xmlns:a16="http://schemas.microsoft.com/office/drawing/2014/main" id="{51739FD0-B88D-4620-861F-D680866D859F}"/>
               </a:ext>
             </a:extLst>
           </p:cNvPr>
@@ -3413,7 +3413,7 @@
           <p:cNvPr id="4" name="">
             <a:extLst xmlns:a="http://schemas.openxmlformats.org/drawingml/2006/main">
               <a:ext uri="{FF2B5EF4-FFF2-40B4-BE49-F238E27FC236}">
-                <a16:creationId xmlns:a16="http://schemas.microsoft.com/office/drawing/2014/main" id="{DD760B90-A74D-493C-A51D-E160049FD1DC}"/>
+                <a16:creationId xmlns:a16="http://schemas.microsoft.com/office/drawing/2014/main" id="{92D47DE4-8755-46B5-901E-3B7418DB81C6}"/>
               </a:ext>
             </a:extLst>
           </p:cNvPr>
@@ -3470,7 +3470,7 @@
           <p:cNvPr id="5" name="">
             <a:extLst xmlns:a="http://schemas.openxmlformats.org/drawingml/2006/main">
               <a:ext uri="{FF2B5EF4-FFF2-40B4-BE49-F238E27FC236}">
-                <a16:creationId xmlns:a16="http://schemas.microsoft.com/office/drawing/2014/main" id="{9EB9480D-29C7-4918-BE06-CADC6BD880D5}"/>
+                <a16:creationId xmlns:a16="http://schemas.microsoft.com/office/drawing/2014/main" id="{72E43FDD-C0F4-46E1-8366-A2E7417E731B}"/>
               </a:ext>
             </a:extLst>
           </p:cNvPr>
@@ -3527,7 +3527,7 @@
           <p:cNvPr id="6" name="">
             <a:extLst xmlns:a="http://schemas.openxmlformats.org/drawingml/2006/main">
               <a:ext uri="{FF2B5EF4-FFF2-40B4-BE49-F238E27FC236}">
-                <a16:creationId xmlns:a16="http://schemas.microsoft.com/office/drawing/2014/main" id="{F3603639-C8FF-43AC-A447-CDA6C8742BA3}"/>
+                <a16:creationId xmlns:a16="http://schemas.microsoft.com/office/drawing/2014/main" id="{4E6CB0A4-52DC-4A8A-A53A-1EB7AD6CF46D}"/>
               </a:ext>
             </a:extLst>
           </p:cNvPr>
@@ -3584,7 +3584,7 @@
           <p:cNvPr id="7" name="">
             <a:extLst xmlns:a="http://schemas.openxmlformats.org/drawingml/2006/main">
               <a:ext uri="{FF2B5EF4-FFF2-40B4-BE49-F238E27FC236}">
-                <a16:creationId xmlns:a16="http://schemas.microsoft.com/office/drawing/2014/main" id="{0243FDE4-B7F5-4FFE-8DC1-75B186507370}"/>
+                <a16:creationId xmlns:a16="http://schemas.microsoft.com/office/drawing/2014/main" id="{CC9C0193-31A1-47C3-B1FD-A2A9773F8062}"/>
               </a:ext>
             </a:extLst>
           </p:cNvPr>
@@ -3616,7 +3616,7 @@
           <p:cNvPr id="8" name="">
             <a:extLst xmlns:a="http://schemas.openxmlformats.org/drawingml/2006/main">
               <a:ext uri="{FF2B5EF4-FFF2-40B4-BE49-F238E27FC236}">
-                <a16:creationId xmlns:a16="http://schemas.microsoft.com/office/drawing/2014/main" id="{303DB557-46A0-4203-9F8C-C38264C5ADFA}"/>
+                <a16:creationId xmlns:a16="http://schemas.microsoft.com/office/drawing/2014/main" id="{72740576-1630-47CB-A551-F21B29A50B3A}"/>
               </a:ext>
             </a:extLst>
           </p:cNvPr>
@@ -3673,7 +3673,7 @@
           <p:cNvPr id="9" name="">
             <a:extLst xmlns:a="http://schemas.openxmlformats.org/drawingml/2006/main">
               <a:ext uri="{FF2B5EF4-FFF2-40B4-BE49-F238E27FC236}">
-                <a16:creationId xmlns:a16="http://schemas.microsoft.com/office/drawing/2014/main" id="{BC3F874E-1F56-438F-B4D1-6D6CE5354CC4}"/>
+                <a16:creationId xmlns:a16="http://schemas.microsoft.com/office/drawing/2014/main" id="{25D4F3B2-B2CE-4BFE-81B3-305A838980A2}"/>
               </a:ext>
             </a:extLst>
           </p:cNvPr>
@@ -3730,7 +3730,7 @@
           <p:cNvPr id="10" name="">
             <a:extLst xmlns:a="http://schemas.openxmlformats.org/drawingml/2006/main">
               <a:ext uri="{FF2B5EF4-FFF2-40B4-BE49-F238E27FC236}">
-                <a16:creationId xmlns:a16="http://schemas.microsoft.com/office/drawing/2014/main" id="{0B151EDA-C07D-4FBE-A3D0-8242B9DB109B}"/>
+                <a16:creationId xmlns:a16="http://schemas.microsoft.com/office/drawing/2014/main" id="{2D7D1F86-71BB-498A-8709-6756FE63445F}"/>
               </a:ext>
             </a:extLst>
           </p:cNvPr>
@@ -3787,7 +3787,7 @@
           <p:cNvPr id="11" name="">
             <a:extLst xmlns:a="http://schemas.openxmlformats.org/drawingml/2006/main">
               <a:ext uri="{FF2B5EF4-FFF2-40B4-BE49-F238E27FC236}">
-                <a16:creationId xmlns:a16="http://schemas.microsoft.com/office/drawing/2014/main" id="{6A8E1DB1-06D2-44B7-BFC9-B534807E1179}"/>
+                <a16:creationId xmlns:a16="http://schemas.microsoft.com/office/drawing/2014/main" id="{527E7359-6A56-49DE-985F-C1253B449786}"/>
               </a:ext>
             </a:extLst>
           </p:cNvPr>
@@ -3821,7 +3821,7 @@
           <p:cNvPr id="12" name="">
             <a:extLst xmlns:a="http://schemas.openxmlformats.org/drawingml/2006/main">
               <a:ext uri="{FF2B5EF4-FFF2-40B4-BE49-F238E27FC236}">
-                <a16:creationId xmlns:a16="http://schemas.microsoft.com/office/drawing/2014/main" id="{736F17C5-EC21-4A01-97C4-9824AE9BB2A1}"/>
+                <a16:creationId xmlns:a16="http://schemas.microsoft.com/office/drawing/2014/main" id="{277363CF-550C-4033-82CB-E2EB0391EBDE}"/>
               </a:ext>
             </a:extLst>
           </p:cNvPr>
@@ -3878,7 +3878,7 @@
           <p:cNvPr id="13" name="">
             <a:extLst xmlns:a="http://schemas.openxmlformats.org/drawingml/2006/main">
               <a:ext uri="{FF2B5EF4-FFF2-40B4-BE49-F238E27FC236}">
-                <a16:creationId xmlns:a16="http://schemas.microsoft.com/office/drawing/2014/main" id="{BFC00636-E12D-4155-B565-A00998ABF043}"/>
+                <a16:creationId xmlns:a16="http://schemas.microsoft.com/office/drawing/2014/main" id="{7C4CCCF3-DD80-47F0-8BAF-CC0580063AF0}"/>
               </a:ext>
             </a:extLst>
           </p:cNvPr>
@@ -3935,7 +3935,7 @@
           <p:cNvPr id="14" name="">
             <a:extLst xmlns:a="http://schemas.openxmlformats.org/drawingml/2006/main">
               <a:ext uri="{FF2B5EF4-FFF2-40B4-BE49-F238E27FC236}">
-                <a16:creationId xmlns:a16="http://schemas.microsoft.com/office/drawing/2014/main" id="{876A7732-945B-439B-ADB3-22D21AEAE274}"/>
+                <a16:creationId xmlns:a16="http://schemas.microsoft.com/office/drawing/2014/main" id="{D50A5716-CECC-455A-B82C-18A371F99865}"/>
               </a:ext>
             </a:extLst>
           </p:cNvPr>
@@ -3992,7 +3992,7 @@
           <p:cNvPr id="15" name="">
             <a:extLst xmlns:a="http://schemas.openxmlformats.org/drawingml/2006/main">
               <a:ext uri="{FF2B5EF4-FFF2-40B4-BE49-F238E27FC236}">
-                <a16:creationId xmlns:a16="http://schemas.microsoft.com/office/drawing/2014/main" id="{5C581AB4-D7AD-4EA9-A8B8-D2229298D05D}"/>
+                <a16:creationId xmlns:a16="http://schemas.microsoft.com/office/drawing/2014/main" id="{7D3AB068-69DD-48D7-A5FC-2BF00AEC6EFA}"/>
               </a:ext>
             </a:extLst>
           </p:cNvPr>
@@ -4026,7 +4026,7 @@
           <p:cNvPr id="16" name="">
             <a:extLst xmlns:a="http://schemas.openxmlformats.org/drawingml/2006/main">
               <a:ext uri="{FF2B5EF4-FFF2-40B4-BE49-F238E27FC236}">
-                <a16:creationId xmlns:a16="http://schemas.microsoft.com/office/drawing/2014/main" id="{8F6B6286-0266-4364-A2FB-2EBDFD50891F}"/>
+                <a16:creationId xmlns:a16="http://schemas.microsoft.com/office/drawing/2014/main" id="{E0A0AEDB-A806-4677-ADAA-C717AB436FE4}"/>
               </a:ext>
             </a:extLst>
           </p:cNvPr>
@@ -4083,7 +4083,7 @@
           <p:cNvPr id="17" name="">
             <a:extLst xmlns:a="http://schemas.openxmlformats.org/drawingml/2006/main">
               <a:ext uri="{FF2B5EF4-FFF2-40B4-BE49-F238E27FC236}">
-                <a16:creationId xmlns:a16="http://schemas.microsoft.com/office/drawing/2014/main" id="{DDFCFCBC-7BD8-48AE-B02D-09416D1215CD}"/>
+                <a16:creationId xmlns:a16="http://schemas.microsoft.com/office/drawing/2014/main" id="{127311BD-6CC3-4F3D-8782-A6DC7BA366C1}"/>
               </a:ext>
             </a:extLst>
           </p:cNvPr>
@@ -4140,7 +4140,7 @@
           <p:cNvPr id="18" name="">
             <a:extLst xmlns:a="http://schemas.openxmlformats.org/drawingml/2006/main">
               <a:ext uri="{FF2B5EF4-FFF2-40B4-BE49-F238E27FC236}">
-                <a16:creationId xmlns:a16="http://schemas.microsoft.com/office/drawing/2014/main" id="{E4045DA1-67DE-4260-9B62-65BAF3D94C2C}"/>
+                <a16:creationId xmlns:a16="http://schemas.microsoft.com/office/drawing/2014/main" id="{B5C269D6-D029-414A-B6C5-0DC5CCC75419}"/>
               </a:ext>
             </a:extLst>
           </p:cNvPr>
@@ -4195,7 +4195,7 @@
     </p:spTree>
     <p:extLst>
       <p:ext uri="{BB962C8B-B14F-4D97-AF65-F5344CB8AC3E}">
-        <p14:creationId xmlns:p14="http://schemas.microsoft.com/office/powerpoint/2010/main" val="1934922926"/>
+        <p14:creationId xmlns:p14="http://schemas.microsoft.com/office/powerpoint/2010/main" val="92852510"/>
       </p:ext>
     </p:extLst>
   </p:cSld>
@@ -4350,7 +4350,7 @@
           <p:cNvPr id="23" name="">
             <a:extLst xmlns:a="http://schemas.openxmlformats.org/drawingml/2006/main">
               <a:ext uri="{FF2B5EF4-FFF2-40B4-BE49-F238E27FC236}">
-                <a16:creationId xmlns:a16="http://schemas.microsoft.com/office/drawing/2014/main" id="{C2E18B0D-EC0B-4D6C-AECC-9CE542B85CC6}"/>
+                <a16:creationId xmlns:a16="http://schemas.microsoft.com/office/drawing/2014/main" id="{570A0454-DC25-4E2B-8CDF-6DCA455FB90E}"/>
               </a:ext>
             </a:extLst>
           </p:cNvPr>
@@ -4382,7 +4382,7 @@
           <p:cNvPr id="2" name="">
             <a:extLst xmlns:a="http://schemas.openxmlformats.org/drawingml/2006/main">
               <a:ext uri="{FF2B5EF4-FFF2-40B4-BE49-F238E27FC236}">
-                <a16:creationId xmlns:a16="http://schemas.microsoft.com/office/drawing/2014/main" id="{B96C1861-1761-45F8-8FF5-F5609B689649}"/>
+                <a16:creationId xmlns:a16="http://schemas.microsoft.com/office/drawing/2014/main" id="{0C069FCB-C4C6-4D66-923F-A9109CAB9AD8}"/>
               </a:ext>
             </a:extLst>
           </p:cNvPr>
@@ -4439,7 +4439,7 @@
           <p:cNvPr id="3" name="">
             <a:extLst xmlns:a="http://schemas.openxmlformats.org/drawingml/2006/main">
               <a:ext uri="{FF2B5EF4-FFF2-40B4-BE49-F238E27FC236}">
-                <a16:creationId xmlns:a16="http://schemas.microsoft.com/office/drawing/2014/main" id="{35E0F9A4-8152-4674-94D2-8C1EE8F86C90}"/>
+                <a16:creationId xmlns:a16="http://schemas.microsoft.com/office/drawing/2014/main" id="{6163957D-D5FD-48C8-BC62-8E8F51ADCAEA}"/>
               </a:ext>
             </a:extLst>
           </p:cNvPr>
@@ -4471,7 +4471,7 @@
           <p:cNvPr id="4" name="">
             <a:extLst xmlns:a="http://schemas.openxmlformats.org/drawingml/2006/main">
               <a:ext uri="{FF2B5EF4-FFF2-40B4-BE49-F238E27FC236}">
-                <a16:creationId xmlns:a16="http://schemas.microsoft.com/office/drawing/2014/main" id="{3A9B090B-B2DE-493E-AF59-04FF3CCF057D}"/>
+                <a16:creationId xmlns:a16="http://schemas.microsoft.com/office/drawing/2014/main" id="{BDE5F963-315B-4988-A1DF-AB44AFCD36A6}"/>
               </a:ext>
             </a:extLst>
           </p:cNvPr>
@@ -4528,7 +4528,7 @@
           <p:cNvPr id="5" name="">
             <a:extLst xmlns:a="http://schemas.openxmlformats.org/drawingml/2006/main">
               <a:ext uri="{FF2B5EF4-FFF2-40B4-BE49-F238E27FC236}">
-                <a16:creationId xmlns:a16="http://schemas.microsoft.com/office/drawing/2014/main" id="{F54C7C3B-AEAC-4BDA-85C0-821024AB1518}"/>
+                <a16:creationId xmlns:a16="http://schemas.microsoft.com/office/drawing/2014/main" id="{BD89BD1D-E7C9-4C92-8730-29578D4BEE3F}"/>
               </a:ext>
             </a:extLst>
           </p:cNvPr>
@@ -4585,7 +4585,7 @@
           <p:cNvPr id="6" name="">
             <a:extLst xmlns:a="http://schemas.openxmlformats.org/drawingml/2006/main">
               <a:ext uri="{FF2B5EF4-FFF2-40B4-BE49-F238E27FC236}">
-                <a16:creationId xmlns:a16="http://schemas.microsoft.com/office/drawing/2014/main" id="{F97DEE3B-65D0-40FD-847A-A598FD391A0C}"/>
+                <a16:creationId xmlns:a16="http://schemas.microsoft.com/office/drawing/2014/main" id="{000F5AAF-FC22-4208-ABBC-373E98FD2B57}"/>
               </a:ext>
             </a:extLst>
           </p:cNvPr>
@@ -4642,7 +4642,7 @@
           <p:cNvPr id="7" name="">
             <a:extLst xmlns:a="http://schemas.openxmlformats.org/drawingml/2006/main">
               <a:ext uri="{FF2B5EF4-FFF2-40B4-BE49-F238E27FC236}">
-                <a16:creationId xmlns:a16="http://schemas.microsoft.com/office/drawing/2014/main" id="{B5A864F5-6AD0-49B0-9308-7B1D3FEA5B85}"/>
+                <a16:creationId xmlns:a16="http://schemas.microsoft.com/office/drawing/2014/main" id="{FD45F5AE-B172-42D8-A9E3-9861497EABEA}"/>
               </a:ext>
             </a:extLst>
           </p:cNvPr>
@@ -4674,7 +4674,7 @@
           <p:cNvPr id="8" name="">
             <a:extLst xmlns:a="http://schemas.openxmlformats.org/drawingml/2006/main">
               <a:ext uri="{FF2B5EF4-FFF2-40B4-BE49-F238E27FC236}">
-                <a16:creationId xmlns:a16="http://schemas.microsoft.com/office/drawing/2014/main" id="{C1DCA7AB-91DB-44D9-B22D-F6995CA23980}"/>
+                <a16:creationId xmlns:a16="http://schemas.microsoft.com/office/drawing/2014/main" id="{F751E03A-8D74-4F3B-9EB0-429835B02929}"/>
               </a:ext>
             </a:extLst>
           </p:cNvPr>
@@ -4731,7 +4731,7 @@
           <p:cNvPr id="9" name="">
             <a:extLst xmlns:a="http://schemas.openxmlformats.org/drawingml/2006/main">
               <a:ext uri="{FF2B5EF4-FFF2-40B4-BE49-F238E27FC236}">
-                <a16:creationId xmlns:a16="http://schemas.microsoft.com/office/drawing/2014/main" id="{94A6DA09-D5D6-4C44-A5AC-29C9C249A14D}"/>
+                <a16:creationId xmlns:a16="http://schemas.microsoft.com/office/drawing/2014/main" id="{B9F695B9-FE68-44D9-8CD4-C41A1F756F71}"/>
               </a:ext>
             </a:extLst>
           </p:cNvPr>
@@ -4788,7 +4788,7 @@
           <p:cNvPr id="10" name="">
             <a:extLst xmlns:a="http://schemas.openxmlformats.org/drawingml/2006/main">
               <a:ext uri="{FF2B5EF4-FFF2-40B4-BE49-F238E27FC236}">
-                <a16:creationId xmlns:a16="http://schemas.microsoft.com/office/drawing/2014/main" id="{A84B0E80-1426-4BCD-828B-31D2463B25E2}"/>
+                <a16:creationId xmlns:a16="http://schemas.microsoft.com/office/drawing/2014/main" id="{0A41C766-10BE-473D-A323-0DAB9772CC6E}"/>
               </a:ext>
             </a:extLst>
           </p:cNvPr>
@@ -4822,7 +4822,7 @@
           <p:cNvPr id="11" name="">
             <a:extLst xmlns:a="http://schemas.openxmlformats.org/drawingml/2006/main">
               <a:ext uri="{FF2B5EF4-FFF2-40B4-BE49-F238E27FC236}">
-                <a16:creationId xmlns:a16="http://schemas.microsoft.com/office/drawing/2014/main" id="{EC9E804D-A70C-4F16-B3A8-E339ECB9D6CB}"/>
+                <a16:creationId xmlns:a16="http://schemas.microsoft.com/office/drawing/2014/main" id="{59E69E51-F965-45B3-BAFC-B3BF53309D55}"/>
               </a:ext>
             </a:extLst>
           </p:cNvPr>
@@ -4854,7 +4854,7 @@
           <p:cNvPr id="12" name="">
             <a:extLst xmlns:a="http://schemas.openxmlformats.org/drawingml/2006/main">
               <a:ext uri="{FF2B5EF4-FFF2-40B4-BE49-F238E27FC236}">
-                <a16:creationId xmlns:a16="http://schemas.microsoft.com/office/drawing/2014/main" id="{11FD2397-7CBD-488D-BCBB-62D327AD3FCD}"/>
+                <a16:creationId xmlns:a16="http://schemas.microsoft.com/office/drawing/2014/main" id="{C66D31FE-4E32-4336-8CAD-4949A6C312B2}"/>
               </a:ext>
             </a:extLst>
           </p:cNvPr>
@@ -4911,7 +4911,7 @@
           <p:cNvPr id="13" name="">
             <a:extLst xmlns:a="http://schemas.openxmlformats.org/drawingml/2006/main">
               <a:ext uri="{FF2B5EF4-FFF2-40B4-BE49-F238E27FC236}">
-                <a16:creationId xmlns:a16="http://schemas.microsoft.com/office/drawing/2014/main" id="{86000116-B89A-4CCC-8046-6ADE6D61273B}"/>
+                <a16:creationId xmlns:a16="http://schemas.microsoft.com/office/drawing/2014/main" id="{CF3F68FC-A9E9-48D8-AAB8-15A9E3B8C77B}"/>
               </a:ext>
             </a:extLst>
           </p:cNvPr>
@@ -4968,7 +4968,7 @@
           <p:cNvPr id="14" name="">
             <a:extLst xmlns:a="http://schemas.openxmlformats.org/drawingml/2006/main">
               <a:ext uri="{FF2B5EF4-FFF2-40B4-BE49-F238E27FC236}">
-                <a16:creationId xmlns:a16="http://schemas.microsoft.com/office/drawing/2014/main" id="{01FC3D34-D894-44A2-93B7-F102D1177565}"/>
+                <a16:creationId xmlns:a16="http://schemas.microsoft.com/office/drawing/2014/main" id="{D8BCBC70-4144-4292-874A-B854CBEBCDE1}"/>
               </a:ext>
             </a:extLst>
           </p:cNvPr>
@@ -5002,7 +5002,7 @@
           <p:cNvPr id="15" name="">
             <a:extLst xmlns:a="http://schemas.openxmlformats.org/drawingml/2006/main">
               <a:ext uri="{FF2B5EF4-FFF2-40B4-BE49-F238E27FC236}">
-                <a16:creationId xmlns:a16="http://schemas.microsoft.com/office/drawing/2014/main" id="{6274FC43-73C7-44C6-9B43-A10C068FFDC6}"/>
+                <a16:creationId xmlns:a16="http://schemas.microsoft.com/office/drawing/2014/main" id="{4B463CF5-1DF5-4305-9D0B-9DAC374531B6}"/>
               </a:ext>
             </a:extLst>
           </p:cNvPr>
@@ -5034,7 +5034,7 @@
           <p:cNvPr id="16" name="">
             <a:extLst xmlns:a="http://schemas.openxmlformats.org/drawingml/2006/main">
               <a:ext uri="{FF2B5EF4-FFF2-40B4-BE49-F238E27FC236}">
-                <a16:creationId xmlns:a16="http://schemas.microsoft.com/office/drawing/2014/main" id="{0D0FAE4C-7EED-4EB2-8ACF-D84A1FD172E7}"/>
+                <a16:creationId xmlns:a16="http://schemas.microsoft.com/office/drawing/2014/main" id="{C8B44A32-9087-4065-BA0C-80FDF48BB22E}"/>
               </a:ext>
             </a:extLst>
           </p:cNvPr>
@@ -5091,7 +5091,7 @@
           <p:cNvPr id="17" name="">
             <a:extLst xmlns:a="http://schemas.openxmlformats.org/drawingml/2006/main">
               <a:ext uri="{FF2B5EF4-FFF2-40B4-BE49-F238E27FC236}">
-                <a16:creationId xmlns:a16="http://schemas.microsoft.com/office/drawing/2014/main" id="{05590A89-976C-456F-B4CA-ABC441382B9E}"/>
+                <a16:creationId xmlns:a16="http://schemas.microsoft.com/office/drawing/2014/main" id="{DB338648-2F7A-476B-A09E-0676AE49F63D}"/>
               </a:ext>
             </a:extLst>
           </p:cNvPr>
@@ -5148,7 +5148,7 @@
           <p:cNvPr id="18" name="">
             <a:extLst xmlns:a="http://schemas.openxmlformats.org/drawingml/2006/main">
               <a:ext uri="{FF2B5EF4-FFF2-40B4-BE49-F238E27FC236}">
-                <a16:creationId xmlns:a16="http://schemas.microsoft.com/office/drawing/2014/main" id="{5317820E-B12E-4991-8189-180FBF6FE5B0}"/>
+                <a16:creationId xmlns:a16="http://schemas.microsoft.com/office/drawing/2014/main" id="{A2DF695F-BE59-4213-A6EB-AE40EECD0B13}"/>
               </a:ext>
             </a:extLst>
           </p:cNvPr>
@@ -5182,7 +5182,7 @@
           <p:cNvPr id="19" name="">
             <a:extLst xmlns:a="http://schemas.openxmlformats.org/drawingml/2006/main">
               <a:ext uri="{FF2B5EF4-FFF2-40B4-BE49-F238E27FC236}">
-                <a16:creationId xmlns:a16="http://schemas.microsoft.com/office/drawing/2014/main" id="{5D599035-53D5-4F9C-A5C0-F8A80B6B06A5}"/>
+                <a16:creationId xmlns:a16="http://schemas.microsoft.com/office/drawing/2014/main" id="{A01ABEE8-0C59-4B6D-8193-45E9C97F4855}"/>
               </a:ext>
             </a:extLst>
           </p:cNvPr>
@@ -5214,7 +5214,7 @@
           <p:cNvPr id="20" name="">
             <a:extLst xmlns:a="http://schemas.openxmlformats.org/drawingml/2006/main">
               <a:ext uri="{FF2B5EF4-FFF2-40B4-BE49-F238E27FC236}">
-                <a16:creationId xmlns:a16="http://schemas.microsoft.com/office/drawing/2014/main" id="{C02B1185-6032-4770-94A7-8980626F4FCB}"/>
+                <a16:creationId xmlns:a16="http://schemas.microsoft.com/office/drawing/2014/main" id="{A5B4E67F-69A1-40A7-B448-C691F7B769CB}"/>
               </a:ext>
             </a:extLst>
           </p:cNvPr>
@@ -5271,7 +5271,7 @@
           <p:cNvPr id="21" name="">
             <a:extLst xmlns:a="http://schemas.openxmlformats.org/drawingml/2006/main">
               <a:ext uri="{FF2B5EF4-FFF2-40B4-BE49-F238E27FC236}">
-                <a16:creationId xmlns:a16="http://schemas.microsoft.com/office/drawing/2014/main" id="{5B62DAC5-52B3-4E2B-A357-B93471CD10CE}"/>
+                <a16:creationId xmlns:a16="http://schemas.microsoft.com/office/drawing/2014/main" id="{AE18319C-ECED-4AA4-9158-18F72914B5DE}"/>
               </a:ext>
             </a:extLst>
           </p:cNvPr>
@@ -5328,7 +5328,7 @@
           <p:cNvPr id="22" name="">
             <a:extLst xmlns:a="http://schemas.openxmlformats.org/drawingml/2006/main">
               <a:ext uri="{FF2B5EF4-FFF2-40B4-BE49-F238E27FC236}">
-                <a16:creationId xmlns:a16="http://schemas.microsoft.com/office/drawing/2014/main" id="{EAD25489-F3E5-4DBC-96D4-B2159CE85FF9}"/>
+                <a16:creationId xmlns:a16="http://schemas.microsoft.com/office/drawing/2014/main" id="{696A1ECD-A4A8-4065-9F8A-5539EAB08B8D}"/>
               </a:ext>
             </a:extLst>
           </p:cNvPr>
@@ -5383,7 +5383,7 @@
     </p:spTree>
     <p:extLst>
       <p:ext uri="{BB962C8B-B14F-4D97-AF65-F5344CB8AC3E}">
-        <p14:creationId xmlns:p14="http://schemas.microsoft.com/office/powerpoint/2010/main" val="1300799187"/>
+        <p14:creationId xmlns:p14="http://schemas.microsoft.com/office/powerpoint/2010/main" val="824045555"/>
       </p:ext>
     </p:extLst>
   </p:cSld>
@@ -5584,7 +5584,7 @@
           <p:cNvPr id="23" name="">
             <a:extLst xmlns:a="http://schemas.openxmlformats.org/drawingml/2006/main">
               <a:ext uri="{FF2B5EF4-FFF2-40B4-BE49-F238E27FC236}">
-                <a16:creationId xmlns:a16="http://schemas.microsoft.com/office/drawing/2014/main" id="{C6310086-480B-406D-AD4F-E2350D427902}"/>
+                <a16:creationId xmlns:a16="http://schemas.microsoft.com/office/drawing/2014/main" id="{7A8E04FD-1FBA-4498-87FD-099DE11629CD}"/>
               </a:ext>
             </a:extLst>
           </p:cNvPr>
@@ -5616,7 +5616,7 @@
           <p:cNvPr id="2" name="">
             <a:extLst xmlns:a="http://schemas.openxmlformats.org/drawingml/2006/main">
               <a:ext uri="{FF2B5EF4-FFF2-40B4-BE49-F238E27FC236}">
-                <a16:creationId xmlns:a16="http://schemas.microsoft.com/office/drawing/2014/main" id="{55D031A8-1A2D-4E61-9315-DA79AD7E5078}"/>
+                <a16:creationId xmlns:a16="http://schemas.microsoft.com/office/drawing/2014/main" id="{159DB2FA-3AC2-4632-A454-21D1DB938667}"/>
               </a:ext>
             </a:extLst>
           </p:cNvPr>
@@ -5673,7 +5673,7 @@
           <p:cNvPr id="3" name="">
             <a:extLst xmlns:a="http://schemas.openxmlformats.org/drawingml/2006/main">
               <a:ext uri="{FF2B5EF4-FFF2-40B4-BE49-F238E27FC236}">
-                <a16:creationId xmlns:a16="http://schemas.microsoft.com/office/drawing/2014/main" id="{146912F2-E259-484A-8F7C-F11F09E947A7}"/>
+                <a16:creationId xmlns:a16="http://schemas.microsoft.com/office/drawing/2014/main" id="{66785E3C-8EDB-4E4A-A212-F1B4C8831E1A}"/>
               </a:ext>
             </a:extLst>
           </p:cNvPr>
@@ -5705,7 +5705,7 @@
           <p:cNvPr id="4" name="">
             <a:extLst xmlns:a="http://schemas.openxmlformats.org/drawingml/2006/main">
               <a:ext uri="{FF2B5EF4-FFF2-40B4-BE49-F238E27FC236}">
-                <a16:creationId xmlns:a16="http://schemas.microsoft.com/office/drawing/2014/main" id="{CE3523A1-F27F-4420-BB88-16908B168E27}"/>
+                <a16:creationId xmlns:a16="http://schemas.microsoft.com/office/drawing/2014/main" id="{B9170971-4A38-486E-ACB2-BE48CF56811E}"/>
               </a:ext>
             </a:extLst>
           </p:cNvPr>
@@ -5762,7 +5762,7 @@
           <p:cNvPr id="5" name="">
             <a:extLst xmlns:a="http://schemas.openxmlformats.org/drawingml/2006/main">
               <a:ext uri="{FF2B5EF4-FFF2-40B4-BE49-F238E27FC236}">
-                <a16:creationId xmlns:a16="http://schemas.microsoft.com/office/drawing/2014/main" id="{1BE508E5-80C8-4961-9E79-BE2F6708123C}"/>
+                <a16:creationId xmlns:a16="http://schemas.microsoft.com/office/drawing/2014/main" id="{981DD5DC-3807-49E6-BDA7-8710976DFF30}"/>
               </a:ext>
             </a:extLst>
           </p:cNvPr>
@@ -5819,7 +5819,7 @@
           <p:cNvPr id="6" name="">
             <a:extLst xmlns:a="http://schemas.openxmlformats.org/drawingml/2006/main">
               <a:ext uri="{FF2B5EF4-FFF2-40B4-BE49-F238E27FC236}">
-                <a16:creationId xmlns:a16="http://schemas.microsoft.com/office/drawing/2014/main" id="{3E466D3F-A901-4801-949A-016C7E3A87B8}"/>
+                <a16:creationId xmlns:a16="http://schemas.microsoft.com/office/drawing/2014/main" id="{F818C43A-6746-4A16-9E05-D57F88DFEBDA}"/>
               </a:ext>
             </a:extLst>
           </p:cNvPr>
@@ -5876,7 +5876,7 @@
           <p:cNvPr id="7" name="">
             <a:extLst xmlns:a="http://schemas.openxmlformats.org/drawingml/2006/main">
               <a:ext uri="{FF2B5EF4-FFF2-40B4-BE49-F238E27FC236}">
-                <a16:creationId xmlns:a16="http://schemas.microsoft.com/office/drawing/2014/main" id="{F426CBB2-BFCB-46CE-BDB1-BB314039EC2A}"/>
+                <a16:creationId xmlns:a16="http://schemas.microsoft.com/office/drawing/2014/main" id="{4C2E0EC3-6FDB-48DA-BF96-719C98699436}"/>
               </a:ext>
             </a:extLst>
           </p:cNvPr>
@@ -5908,7 +5908,7 @@
           <p:cNvPr id="8" name="">
             <a:extLst xmlns:a="http://schemas.openxmlformats.org/drawingml/2006/main">
               <a:ext uri="{FF2B5EF4-FFF2-40B4-BE49-F238E27FC236}">
-                <a16:creationId xmlns:a16="http://schemas.microsoft.com/office/drawing/2014/main" id="{40C46D21-C469-4A60-9C1D-56B2A9F07E5C}"/>
+                <a16:creationId xmlns:a16="http://schemas.microsoft.com/office/drawing/2014/main" id="{D971758E-4FD8-4FBE-A758-431A05F47705}"/>
               </a:ext>
             </a:extLst>
           </p:cNvPr>
@@ -5965,7 +5965,7 @@
           <p:cNvPr id="9" name="">
             <a:extLst xmlns:a="http://schemas.openxmlformats.org/drawingml/2006/main">
               <a:ext uri="{FF2B5EF4-FFF2-40B4-BE49-F238E27FC236}">
-                <a16:creationId xmlns:a16="http://schemas.microsoft.com/office/drawing/2014/main" id="{9384B670-A682-4499-B4C9-C93931B3ACF9}"/>
+                <a16:creationId xmlns:a16="http://schemas.microsoft.com/office/drawing/2014/main" id="{BCB43E6D-D6A7-45D1-B425-ACC389413070}"/>
               </a:ext>
             </a:extLst>
           </p:cNvPr>
@@ -6022,7 +6022,7 @@
           <p:cNvPr id="10" name="">
             <a:extLst xmlns:a="http://schemas.openxmlformats.org/drawingml/2006/main">
               <a:ext uri="{FF2B5EF4-FFF2-40B4-BE49-F238E27FC236}">
-                <a16:creationId xmlns:a16="http://schemas.microsoft.com/office/drawing/2014/main" id="{144C9BA7-216C-4857-96E3-92C355F13D9B}"/>
+                <a16:creationId xmlns:a16="http://schemas.microsoft.com/office/drawing/2014/main" id="{F75CA104-BDC9-41BA-A4E4-D4DDD128F605}"/>
               </a:ext>
             </a:extLst>
           </p:cNvPr>
@@ -6056,7 +6056,7 @@
           <p:cNvPr id="11" name="">
             <a:extLst xmlns:a="http://schemas.openxmlformats.org/drawingml/2006/main">
               <a:ext uri="{FF2B5EF4-FFF2-40B4-BE49-F238E27FC236}">
-                <a16:creationId xmlns:a16="http://schemas.microsoft.com/office/drawing/2014/main" id="{88C581CC-7309-42FA-A575-A62799EA7AA0}"/>
+                <a16:creationId xmlns:a16="http://schemas.microsoft.com/office/drawing/2014/main" id="{5E739535-47D5-41A5-8A33-1770CE010B4E}"/>
               </a:ext>
             </a:extLst>
           </p:cNvPr>
@@ -6088,7 +6088,7 @@
           <p:cNvPr id="12" name="">
             <a:extLst xmlns:a="http://schemas.openxmlformats.org/drawingml/2006/main">
               <a:ext uri="{FF2B5EF4-FFF2-40B4-BE49-F238E27FC236}">
-                <a16:creationId xmlns:a16="http://schemas.microsoft.com/office/drawing/2014/main" id="{D97ACDED-A770-4C3F-94F5-E428499A691E}"/>
+                <a16:creationId xmlns:a16="http://schemas.microsoft.com/office/drawing/2014/main" id="{B89B7EBA-1A5E-4118-A758-5793056AB456}"/>
               </a:ext>
             </a:extLst>
           </p:cNvPr>
@@ -6145,7 +6145,7 @@
           <p:cNvPr id="13" name="">
             <a:extLst xmlns:a="http://schemas.openxmlformats.org/drawingml/2006/main">
               <a:ext uri="{FF2B5EF4-FFF2-40B4-BE49-F238E27FC236}">
-                <a16:creationId xmlns:a16="http://schemas.microsoft.com/office/drawing/2014/main" id="{57D479C1-58AA-43F2-A5A4-0B8C5A4EFDA9}"/>
+                <a16:creationId xmlns:a16="http://schemas.microsoft.com/office/drawing/2014/main" id="{CD09448F-4D32-4EF6-B73F-6970B4D348C4}"/>
               </a:ext>
             </a:extLst>
           </p:cNvPr>
@@ -6202,7 +6202,7 @@
           <p:cNvPr id="14" name="">
             <a:extLst xmlns:a="http://schemas.openxmlformats.org/drawingml/2006/main">
               <a:ext uri="{FF2B5EF4-FFF2-40B4-BE49-F238E27FC236}">
-                <a16:creationId xmlns:a16="http://schemas.microsoft.com/office/drawing/2014/main" id="{24FED7E1-A688-42DF-BDB0-EF583BAE8A48}"/>
+                <a16:creationId xmlns:a16="http://schemas.microsoft.com/office/drawing/2014/main" id="{747A3616-4390-4188-A7AE-A7EA00C6A230}"/>
               </a:ext>
             </a:extLst>
           </p:cNvPr>
@@ -6236,7 +6236,7 @@
           <p:cNvPr id="15" name="">
             <a:extLst xmlns:a="http://schemas.openxmlformats.org/drawingml/2006/main">
               <a:ext uri="{FF2B5EF4-FFF2-40B4-BE49-F238E27FC236}">
-                <a16:creationId xmlns:a16="http://schemas.microsoft.com/office/drawing/2014/main" id="{30DD3BD1-DF1D-4C17-A7D3-B5B92738D053}"/>
+                <a16:creationId xmlns:a16="http://schemas.microsoft.com/office/drawing/2014/main" id="{6A31DF39-4FBB-4C60-BAF5-88999262E0B8}"/>
               </a:ext>
             </a:extLst>
           </p:cNvPr>
@@ -6268,7 +6268,7 @@
           <p:cNvPr id="16" name="">
             <a:extLst xmlns:a="http://schemas.openxmlformats.org/drawingml/2006/main">
               <a:ext uri="{FF2B5EF4-FFF2-40B4-BE49-F238E27FC236}">
-                <a16:creationId xmlns:a16="http://schemas.microsoft.com/office/drawing/2014/main" id="{16F2399C-2E26-49E8-A9E5-F25375BB63F7}"/>
+                <a16:creationId xmlns:a16="http://schemas.microsoft.com/office/drawing/2014/main" id="{6D492A69-6257-4DA2-9DBF-0F74DF08D92E}"/>
               </a:ext>
             </a:extLst>
           </p:cNvPr>
@@ -6325,7 +6325,7 @@
           <p:cNvPr id="17" name="">
             <a:extLst xmlns:a="http://schemas.openxmlformats.org/drawingml/2006/main">
               <a:ext uri="{FF2B5EF4-FFF2-40B4-BE49-F238E27FC236}">
-                <a16:creationId xmlns:a16="http://schemas.microsoft.com/office/drawing/2014/main" id="{010FD982-BD13-4409-B4F8-CA4A310BE49D}"/>
+                <a16:creationId xmlns:a16="http://schemas.microsoft.com/office/drawing/2014/main" id="{E821D84A-9BE5-4C4B-8D2D-4010E2096FB3}"/>
               </a:ext>
             </a:extLst>
           </p:cNvPr>
@@ -6382,7 +6382,7 @@
           <p:cNvPr id="18" name="">
             <a:extLst xmlns:a="http://schemas.openxmlformats.org/drawingml/2006/main">
               <a:ext uri="{FF2B5EF4-FFF2-40B4-BE49-F238E27FC236}">
-                <a16:creationId xmlns:a16="http://schemas.microsoft.com/office/drawing/2014/main" id="{CF90B2A0-D51A-494A-9824-6AF8A4D97D09}"/>
+                <a16:creationId xmlns:a16="http://schemas.microsoft.com/office/drawing/2014/main" id="{A28394D0-4976-46FA-B1F4-6CB361C6A626}"/>
               </a:ext>
             </a:extLst>
           </p:cNvPr>
@@ -6416,7 +6416,7 @@
           <p:cNvPr id="19" name="">
             <a:extLst xmlns:a="http://schemas.openxmlformats.org/drawingml/2006/main">
               <a:ext uri="{FF2B5EF4-FFF2-40B4-BE49-F238E27FC236}">
-                <a16:creationId xmlns:a16="http://schemas.microsoft.com/office/drawing/2014/main" id="{7B5FD7CF-0C72-4928-A7EE-89BF84935E43}"/>
+                <a16:creationId xmlns:a16="http://schemas.microsoft.com/office/drawing/2014/main" id="{5CBC57C0-D673-427F-8933-6AD088AAE800}"/>
               </a:ext>
             </a:extLst>
           </p:cNvPr>
@@ -6448,7 +6448,7 @@
           <p:cNvPr id="20" name="">
             <a:extLst xmlns:a="http://schemas.openxmlformats.org/drawingml/2006/main">
               <a:ext uri="{FF2B5EF4-FFF2-40B4-BE49-F238E27FC236}">
-                <a16:creationId xmlns:a16="http://schemas.microsoft.com/office/drawing/2014/main" id="{16B11285-0ECB-4752-A294-5F8D78B6F66D}"/>
+                <a16:creationId xmlns:a16="http://schemas.microsoft.com/office/drawing/2014/main" id="{222AD144-1159-41E5-89F0-86A6F07A14CA}"/>
               </a:ext>
             </a:extLst>
           </p:cNvPr>
@@ -6505,7 +6505,7 @@
           <p:cNvPr id="21" name="">
             <a:extLst xmlns:a="http://schemas.openxmlformats.org/drawingml/2006/main">
               <a:ext uri="{FF2B5EF4-FFF2-40B4-BE49-F238E27FC236}">
-                <a16:creationId xmlns:a16="http://schemas.microsoft.com/office/drawing/2014/main" id="{FB321FDC-C10F-4161-8683-4932A7AD2997}"/>
+                <a16:creationId xmlns:a16="http://schemas.microsoft.com/office/drawing/2014/main" id="{BF4E6D42-88E1-4BDA-A156-61F844156631}"/>
               </a:ext>
             </a:extLst>
           </p:cNvPr>
@@ -6562,7 +6562,7 @@
           <p:cNvPr id="22" name="">
             <a:extLst xmlns:a="http://schemas.openxmlformats.org/drawingml/2006/main">
               <a:ext uri="{FF2B5EF4-FFF2-40B4-BE49-F238E27FC236}">
-                <a16:creationId xmlns:a16="http://schemas.microsoft.com/office/drawing/2014/main" id="{F8ABE278-AD39-42E8-B248-F39A209253FD}"/>
+                <a16:creationId xmlns:a16="http://schemas.microsoft.com/office/drawing/2014/main" id="{99BCDD1E-1A4A-4EE3-9C10-B799DE6253D2}"/>
               </a:ext>
             </a:extLst>
           </p:cNvPr>
@@ -6617,7 +6617,7 @@
     </p:spTree>
     <p:extLst>
       <p:ext uri="{BB962C8B-B14F-4D97-AF65-F5344CB8AC3E}">
-        <p14:creationId xmlns:p14="http://schemas.microsoft.com/office/powerpoint/2010/main" val="100387608"/>
+        <p14:creationId xmlns:p14="http://schemas.microsoft.com/office/powerpoint/2010/main" val="989192913"/>
       </p:ext>
     </p:extLst>
   </p:cSld>
@@ -6818,7 +6818,7 @@
           <p:cNvPr id="16" name="">
             <a:extLst xmlns:a="http://schemas.openxmlformats.org/drawingml/2006/main">
               <a:ext uri="{FF2B5EF4-FFF2-40B4-BE49-F238E27FC236}">
-                <a16:creationId xmlns:a16="http://schemas.microsoft.com/office/drawing/2014/main" id="{2690E6AF-D376-4D12-83D2-BC1D8ACA27E1}"/>
+                <a16:creationId xmlns:a16="http://schemas.microsoft.com/office/drawing/2014/main" id="{C87F5B03-FE43-40B5-9A3E-A92F88F0BE33}"/>
               </a:ext>
             </a:extLst>
           </p:cNvPr>
@@ -6850,7 +6850,7 @@
           <p:cNvPr id="2" name="">
             <a:extLst xmlns:a="http://schemas.openxmlformats.org/drawingml/2006/main">
               <a:ext uri="{FF2B5EF4-FFF2-40B4-BE49-F238E27FC236}">
-                <a16:creationId xmlns:a16="http://schemas.microsoft.com/office/drawing/2014/main" id="{CF6E36A1-8E78-453F-89CA-9003F3D21B33}"/>
+                <a16:creationId xmlns:a16="http://schemas.microsoft.com/office/drawing/2014/main" id="{5D3CDC7A-E5AB-4164-9F92-FAB329372154}"/>
               </a:ext>
             </a:extLst>
           </p:cNvPr>
@@ -6907,7 +6907,7 @@
           <p:cNvPr id="3" name="">
             <a:extLst xmlns:a="http://schemas.openxmlformats.org/drawingml/2006/main">
               <a:ext uri="{FF2B5EF4-FFF2-40B4-BE49-F238E27FC236}">
-                <a16:creationId xmlns:a16="http://schemas.microsoft.com/office/drawing/2014/main" id="{6578D56D-575C-4F33-BCCC-E20684A8CA16}"/>
+                <a16:creationId xmlns:a16="http://schemas.microsoft.com/office/drawing/2014/main" id="{7DA606E8-DB2F-438B-91E2-39A0708A5CBB}"/>
               </a:ext>
             </a:extLst>
           </p:cNvPr>
@@ -6939,7 +6939,7 @@
           <p:cNvPr id="4" name="">
             <a:extLst xmlns:a="http://schemas.openxmlformats.org/drawingml/2006/main">
               <a:ext uri="{FF2B5EF4-FFF2-40B4-BE49-F238E27FC236}">
-                <a16:creationId xmlns:a16="http://schemas.microsoft.com/office/drawing/2014/main" id="{7E40C9FE-6060-48EB-A092-6E025DF120B4}"/>
+                <a16:creationId xmlns:a16="http://schemas.microsoft.com/office/drawing/2014/main" id="{4A88221A-03B6-47BD-90B8-33145BD5B8C5}"/>
               </a:ext>
             </a:extLst>
           </p:cNvPr>
@@ -6996,7 +6996,7 @@
           <p:cNvPr id="5" name="">
             <a:extLst xmlns:a="http://schemas.openxmlformats.org/drawingml/2006/main">
               <a:ext uri="{FF2B5EF4-FFF2-40B4-BE49-F238E27FC236}">
-                <a16:creationId xmlns:a16="http://schemas.microsoft.com/office/drawing/2014/main" id="{88738C91-0654-43F3-A8E1-DE69ECC9C512}"/>
+                <a16:creationId xmlns:a16="http://schemas.microsoft.com/office/drawing/2014/main" id="{AC654590-E83C-4B7D-AC57-7F9B178B0A81}"/>
               </a:ext>
             </a:extLst>
           </p:cNvPr>
@@ -7053,7 +7053,7 @@
           <p:cNvPr id="6" name="">
             <a:extLst xmlns:a="http://schemas.openxmlformats.org/drawingml/2006/main">
               <a:ext uri="{FF2B5EF4-FFF2-40B4-BE49-F238E27FC236}">
-                <a16:creationId xmlns:a16="http://schemas.microsoft.com/office/drawing/2014/main" id="{EC4D5D2F-8BF5-4A5A-9F81-B1224E6BF662}"/>
+                <a16:creationId xmlns:a16="http://schemas.microsoft.com/office/drawing/2014/main" id="{BBAAD57F-1407-4329-BDCF-D7F05C57E11E}"/>
               </a:ext>
             </a:extLst>
           </p:cNvPr>
@@ -7110,7 +7110,7 @@
           <p:cNvPr id="7" name="">
             <a:extLst xmlns:a="http://schemas.openxmlformats.org/drawingml/2006/main">
               <a:ext uri="{FF2B5EF4-FFF2-40B4-BE49-F238E27FC236}">
-                <a16:creationId xmlns:a16="http://schemas.microsoft.com/office/drawing/2014/main" id="{2D6D5DC7-BDF5-43CB-BD4A-46D5A1F9C1D5}"/>
+                <a16:creationId xmlns:a16="http://schemas.microsoft.com/office/drawing/2014/main" id="{97E74022-D361-4EB8-805D-6DF0F85AC34B}"/>
               </a:ext>
             </a:extLst>
           </p:cNvPr>
@@ -7142,7 +7142,7 @@
           <p:cNvPr id="8" name="">
             <a:extLst xmlns:a="http://schemas.openxmlformats.org/drawingml/2006/main">
               <a:ext uri="{FF2B5EF4-FFF2-40B4-BE49-F238E27FC236}">
-                <a16:creationId xmlns:a16="http://schemas.microsoft.com/office/drawing/2014/main" id="{040C5261-227E-4C6F-86EA-678BBDEF5451}"/>
+                <a16:creationId xmlns:a16="http://schemas.microsoft.com/office/drawing/2014/main" id="{9983EFAA-2634-4EB5-9735-F3962A5C531A}"/>
               </a:ext>
             </a:extLst>
           </p:cNvPr>
@@ -7199,7 +7199,7 @@
           <p:cNvPr id="9" name="">
             <a:extLst xmlns:a="http://schemas.openxmlformats.org/drawingml/2006/main">
               <a:ext uri="{FF2B5EF4-FFF2-40B4-BE49-F238E27FC236}">
-                <a16:creationId xmlns:a16="http://schemas.microsoft.com/office/drawing/2014/main" id="{6E9F4CBF-B52F-4162-97E0-A330DC1C1320}"/>
+                <a16:creationId xmlns:a16="http://schemas.microsoft.com/office/drawing/2014/main" id="{ED4C53B9-818B-4C8C-9A14-073C5D9FF5D1}"/>
               </a:ext>
             </a:extLst>
           </p:cNvPr>
@@ -7256,7 +7256,7 @@
           <p:cNvPr id="10" name="">
             <a:extLst xmlns:a="http://schemas.openxmlformats.org/drawingml/2006/main">
               <a:ext uri="{FF2B5EF4-FFF2-40B4-BE49-F238E27FC236}">
-                <a16:creationId xmlns:a16="http://schemas.microsoft.com/office/drawing/2014/main" id="{D4DCA585-5FE6-40AD-BE8B-2C788E22EE4B}"/>
+                <a16:creationId xmlns:a16="http://schemas.microsoft.com/office/drawing/2014/main" id="{F22D7BF6-19A0-40CB-BBB2-25BC82EF21E8}"/>
               </a:ext>
             </a:extLst>
           </p:cNvPr>
@@ -7313,7 +7313,7 @@
           <p:cNvPr id="11" name="">
             <a:extLst xmlns:a="http://schemas.openxmlformats.org/drawingml/2006/main">
               <a:ext uri="{FF2B5EF4-FFF2-40B4-BE49-F238E27FC236}">
-                <a16:creationId xmlns:a16="http://schemas.microsoft.com/office/drawing/2014/main" id="{A56F9C6F-1F6A-4FDD-965E-DC499875B8CA}"/>
+                <a16:creationId xmlns:a16="http://schemas.microsoft.com/office/drawing/2014/main" id="{9BAFABCC-E8E4-4D8A-B26A-9E67B0564F76}"/>
               </a:ext>
             </a:extLst>
           </p:cNvPr>
@@ -7345,7 +7345,7 @@
           <p:cNvPr id="12" name="">
             <a:extLst xmlns:a="http://schemas.openxmlformats.org/drawingml/2006/main">
               <a:ext uri="{FF2B5EF4-FFF2-40B4-BE49-F238E27FC236}">
-                <a16:creationId xmlns:a16="http://schemas.microsoft.com/office/drawing/2014/main" id="{7F673A19-5A93-49C6-ABD8-87B35828C589}"/>
+                <a16:creationId xmlns:a16="http://schemas.microsoft.com/office/drawing/2014/main" id="{4C1E156E-CF98-4240-AE7E-7B764F2AE7ED}"/>
               </a:ext>
             </a:extLst>
           </p:cNvPr>
@@ -7402,7 +7402,7 @@
           <p:cNvPr id="13" name="">
             <a:extLst xmlns:a="http://schemas.openxmlformats.org/drawingml/2006/main">
               <a:ext uri="{FF2B5EF4-FFF2-40B4-BE49-F238E27FC236}">
-                <a16:creationId xmlns:a16="http://schemas.microsoft.com/office/drawing/2014/main" id="{F721162B-F098-477A-91C5-46FA29F30E2B}"/>
+                <a16:creationId xmlns:a16="http://schemas.microsoft.com/office/drawing/2014/main" id="{359B75B3-9342-456A-B17E-3EC54A07A091}"/>
               </a:ext>
             </a:extLst>
           </p:cNvPr>
@@ -7459,7 +7459,7 @@
           <p:cNvPr id="14" name="">
             <a:extLst xmlns:a="http://schemas.openxmlformats.org/drawingml/2006/main">
               <a:ext uri="{FF2B5EF4-FFF2-40B4-BE49-F238E27FC236}">
-                <a16:creationId xmlns:a16="http://schemas.microsoft.com/office/drawing/2014/main" id="{D5C4EEEE-809C-437A-A6D2-82B3DAB68CD0}"/>
+                <a16:creationId xmlns:a16="http://schemas.microsoft.com/office/drawing/2014/main" id="{D558AF45-123D-4C68-BC1C-FD0B77A5A823}"/>
               </a:ext>
             </a:extLst>
           </p:cNvPr>
@@ -7516,7 +7516,7 @@
           <p:cNvPr id="15" name="">
             <a:extLst xmlns:a="http://schemas.openxmlformats.org/drawingml/2006/main">
               <a:ext uri="{FF2B5EF4-FFF2-40B4-BE49-F238E27FC236}">
-                <a16:creationId xmlns:a16="http://schemas.microsoft.com/office/drawing/2014/main" id="{FD62B6B5-7911-4755-9D20-8640B820EE75}"/>
+                <a16:creationId xmlns:a16="http://schemas.microsoft.com/office/drawing/2014/main" id="{BAEA113C-DF4E-4DBD-8322-4E89061559EC}"/>
               </a:ext>
             </a:extLst>
           </p:cNvPr>
@@ -7571,7 +7571,7 @@
     </p:spTree>
     <p:extLst>
       <p:ext uri="{BB962C8B-B14F-4D97-AF65-F5344CB8AC3E}">
-        <p14:creationId xmlns:p14="http://schemas.microsoft.com/office/powerpoint/2010/main" val="1883306190"/>
+        <p14:creationId xmlns:p14="http://schemas.microsoft.com/office/powerpoint/2010/main" val="543686351"/>
       </p:ext>
     </p:extLst>
   </p:cSld>
@@ -7772,7 +7772,7 @@
           <p:cNvPr id="23" name="">
             <a:extLst xmlns:a="http://schemas.openxmlformats.org/drawingml/2006/main">
               <a:ext uri="{FF2B5EF4-FFF2-40B4-BE49-F238E27FC236}">
-                <a16:creationId xmlns:a16="http://schemas.microsoft.com/office/drawing/2014/main" id="{43B27D4C-713F-4AC4-9350-35296BAF2FC4}"/>
+                <a16:creationId xmlns:a16="http://schemas.microsoft.com/office/drawing/2014/main" id="{ACAC9D2E-EBEC-4532-88E1-BEDE4B18F7E6}"/>
               </a:ext>
             </a:extLst>
           </p:cNvPr>
@@ -7804,7 +7804,7 @@
           <p:cNvPr id="2" name="">
             <a:extLst xmlns:a="http://schemas.openxmlformats.org/drawingml/2006/main">
               <a:ext uri="{FF2B5EF4-FFF2-40B4-BE49-F238E27FC236}">
-                <a16:creationId xmlns:a16="http://schemas.microsoft.com/office/drawing/2014/main" id="{EE6681EB-C4F6-4410-983E-5E99D3E9A9E8}"/>
+                <a16:creationId xmlns:a16="http://schemas.microsoft.com/office/drawing/2014/main" id="{72207885-50F4-471F-884B-A535B1A14687}"/>
               </a:ext>
             </a:extLst>
           </p:cNvPr>
@@ -7861,7 +7861,7 @@
           <p:cNvPr id="3" name="">
             <a:extLst xmlns:a="http://schemas.openxmlformats.org/drawingml/2006/main">
               <a:ext uri="{FF2B5EF4-FFF2-40B4-BE49-F238E27FC236}">
-                <a16:creationId xmlns:a16="http://schemas.microsoft.com/office/drawing/2014/main" id="{731DF4C8-3DFE-4B71-8F72-3499248D5C2F}"/>
+                <a16:creationId xmlns:a16="http://schemas.microsoft.com/office/drawing/2014/main" id="{108D1AD5-2E80-46A1-9185-97ABA444A7DD}"/>
               </a:ext>
             </a:extLst>
           </p:cNvPr>
@@ -7893,7 +7893,7 @@
           <p:cNvPr id="4" name="">
             <a:extLst xmlns:a="http://schemas.openxmlformats.org/drawingml/2006/main">
               <a:ext uri="{FF2B5EF4-FFF2-40B4-BE49-F238E27FC236}">
-                <a16:creationId xmlns:a16="http://schemas.microsoft.com/office/drawing/2014/main" id="{73CAF852-1756-41A5-914B-D6B2DCB26A5D}"/>
+                <a16:creationId xmlns:a16="http://schemas.microsoft.com/office/drawing/2014/main" id="{F81013F1-8816-4BDA-B3C4-87F677AC7F17}"/>
               </a:ext>
             </a:extLst>
           </p:cNvPr>
@@ -7950,7 +7950,7 @@
           <p:cNvPr id="5" name="">
             <a:extLst xmlns:a="http://schemas.openxmlformats.org/drawingml/2006/main">
               <a:ext uri="{FF2B5EF4-FFF2-40B4-BE49-F238E27FC236}">
-                <a16:creationId xmlns:a16="http://schemas.microsoft.com/office/drawing/2014/main" id="{A2A99671-A774-4C65-8E2A-3AABD3E1DFF7}"/>
+                <a16:creationId xmlns:a16="http://schemas.microsoft.com/office/drawing/2014/main" id="{5A3E5AD2-4B53-4A63-86E2-3EFE68CDBD89}"/>
               </a:ext>
             </a:extLst>
           </p:cNvPr>
@@ -8007,7 +8007,7 @@
           <p:cNvPr id="6" name="">
             <a:extLst xmlns:a="http://schemas.openxmlformats.org/drawingml/2006/main">
               <a:ext uri="{FF2B5EF4-FFF2-40B4-BE49-F238E27FC236}">
-                <a16:creationId xmlns:a16="http://schemas.microsoft.com/office/drawing/2014/main" id="{1F53E44B-B2CB-4534-A192-A7DEED19A481}"/>
+                <a16:creationId xmlns:a16="http://schemas.microsoft.com/office/drawing/2014/main" id="{E20E5334-FA90-4AB6-A15B-915F86DB2078}"/>
               </a:ext>
             </a:extLst>
           </p:cNvPr>
@@ -8064,7 +8064,7 @@
           <p:cNvPr id="7" name="">
             <a:extLst xmlns:a="http://schemas.openxmlformats.org/drawingml/2006/main">
               <a:ext uri="{FF2B5EF4-FFF2-40B4-BE49-F238E27FC236}">
-                <a16:creationId xmlns:a16="http://schemas.microsoft.com/office/drawing/2014/main" id="{E4F0EA89-9E6C-470F-9155-026E4D82E226}"/>
+                <a16:creationId xmlns:a16="http://schemas.microsoft.com/office/drawing/2014/main" id="{9BDF7DFF-067E-4AA5-B954-88D5E15D21B2}"/>
               </a:ext>
             </a:extLst>
           </p:cNvPr>
@@ -8096,7 +8096,7 @@
           <p:cNvPr id="8" name="">
             <a:extLst xmlns:a="http://schemas.openxmlformats.org/drawingml/2006/main">
               <a:ext uri="{FF2B5EF4-FFF2-40B4-BE49-F238E27FC236}">
-                <a16:creationId xmlns:a16="http://schemas.microsoft.com/office/drawing/2014/main" id="{F146DD95-593B-4C2B-BE67-6D199DAE0A54}"/>
+                <a16:creationId xmlns:a16="http://schemas.microsoft.com/office/drawing/2014/main" id="{DAE5ADF0-15A0-40A8-A6AF-0DD5C32CE7EE}"/>
               </a:ext>
             </a:extLst>
           </p:cNvPr>
@@ -8153,7 +8153,7 @@
           <p:cNvPr id="9" name="">
             <a:extLst xmlns:a="http://schemas.openxmlformats.org/drawingml/2006/main">
               <a:ext uri="{FF2B5EF4-FFF2-40B4-BE49-F238E27FC236}">
-                <a16:creationId xmlns:a16="http://schemas.microsoft.com/office/drawing/2014/main" id="{0DB62C75-1D6C-4D7D-8C11-7101DE59ED41}"/>
+                <a16:creationId xmlns:a16="http://schemas.microsoft.com/office/drawing/2014/main" id="{ED4D1F29-D494-4325-990B-7DA38272996A}"/>
               </a:ext>
             </a:extLst>
           </p:cNvPr>
@@ -8210,19 +8210,19 @@
           <p:cNvPr id="10" name="">
             <a:extLst xmlns:a="http://schemas.openxmlformats.org/drawingml/2006/main">
               <a:ext uri="{FF2B5EF4-FFF2-40B4-BE49-F238E27FC236}">
-                <a16:creationId xmlns:a16="http://schemas.microsoft.com/office/drawing/2014/main" id="{2C71FF80-E26F-40BD-8B03-73FF76C6BB12}"/>
-              </a:ext>
-            </a:extLst>
-          </p:cNvPr>
-          <p:cNvSpPr>
-            <a:spLocks xmlns:a="http://schemas.openxmlformats.org/drawingml/2006/main" noGrp="1"/>
-          </p:cNvSpPr>
-          <p:nvPr/>
-        </p:nvSpPr>
-        <p:spPr>
-          <a:xfrm xmlns:a="http://schemas.openxmlformats.org/drawingml/2006/main">
-            <a:off x="914400" y="1257300"/>
-            <a:ext cx="10363200" cy="781050"/>
+                <a16:creationId xmlns:a16="http://schemas.microsoft.com/office/drawing/2014/main" id="{D134CD48-7B0A-414E-B5F4-C02C2296E779}"/>
+              </a:ext>
+            </a:extLst>
+          </p:cNvPr>
+          <p:cNvSpPr>
+            <a:spLocks xmlns:a="http://schemas.openxmlformats.org/drawingml/2006/main" noGrp="1"/>
+          </p:cNvSpPr>
+          <p:nvPr/>
+        </p:nvSpPr>
+        <p:spPr>
+          <a:xfrm xmlns:a="http://schemas.openxmlformats.org/drawingml/2006/main">
+            <a:off x="857250" y="1219200"/>
+            <a:ext cx="10477500" cy="742950"/>
           </a:xfrm>
           <a:prstGeom xmlns:a="http://schemas.openxmlformats.org/drawingml/2006/main" prst="rect">
             <a:avLst/>
@@ -8239,7 +8239,7 @@
           <a:lstStyle xmlns:a="http://schemas.openxmlformats.org/drawingml/2006/main"/>
           <a:p xmlns:a="http://schemas.openxmlformats.org/drawingml/2006/main">
             <a:pPr algn="ctr">
-              <a:defRPr sz="2175" b="1">
+              <a:defRPr sz="2100" b="1">
                 <a:solidFill>
                   <a:srgbClr val="17253A"/>
                 </a:solidFill>
@@ -8249,7 +8249,7 @@
               </a:defRPr>
             </a:pPr>
             <a:r>
-              <a:rPr sz="2175" b="1">
+              <a:rPr sz="2100" b="1">
                 <a:solidFill>
                   <a:srgbClr val="17253A"/>
                 </a:solidFill>
@@ -8267,28 +8267,30 @@
           <p:cNvPr id="11" name="">
             <a:extLst xmlns:a="http://schemas.openxmlformats.org/drawingml/2006/main">
               <a:ext uri="{FF2B5EF4-FFF2-40B4-BE49-F238E27FC236}">
-                <a16:creationId xmlns:a16="http://schemas.microsoft.com/office/drawing/2014/main" id="{7907D73A-CE76-4F2A-8135-8A464B080782}"/>
-              </a:ext>
-            </a:extLst>
-          </p:cNvPr>
-          <p:cNvSpPr>
-            <a:spLocks xmlns:a="http://schemas.openxmlformats.org/drawingml/2006/main" noGrp="1"/>
-          </p:cNvSpPr>
-          <p:nvPr/>
-        </p:nvSpPr>
-        <p:spPr>
-          <a:xfrm xmlns:a="http://schemas.openxmlformats.org/drawingml/2006/main">
-            <a:off x="1000125" y="2247900"/>
-            <a:ext cx="476250" cy="476250"/>
-          </a:xfrm>
-          <a:prstGeom xmlns:a="http://schemas.openxmlformats.org/drawingml/2006/main" prst="ellipse">
+                <a16:creationId xmlns:a16="http://schemas.microsoft.com/office/drawing/2014/main" id="{A3B03014-8145-4872-9620-2CF8BEE6D8DF}"/>
+              </a:ext>
+            </a:extLst>
+          </p:cNvPr>
+          <p:cNvSpPr>
+            <a:spLocks xmlns:a="http://schemas.openxmlformats.org/drawingml/2006/main" noGrp="1"/>
+          </p:cNvSpPr>
+          <p:nvPr/>
+        </p:nvSpPr>
+        <p:spPr>
+          <a:xfrm xmlns:a="http://schemas.openxmlformats.org/drawingml/2006/main">
+            <a:off x="971550" y="2124075"/>
+            <a:ext cx="38100" cy="3524250"/>
+          </a:xfrm>
+          <a:prstGeom xmlns:a="http://schemas.openxmlformats.org/drawingml/2006/main" prst="rect">
             <a:avLst/>
           </a:prstGeom>
           <a:solidFill xmlns:a="http://schemas.openxmlformats.org/drawingml/2006/main">
-            <a:srgbClr val="18324A"/>
+            <a:srgbClr val="2C6E73"/>
           </a:solidFill>
           <a:ln xmlns:a="http://schemas.openxmlformats.org/drawingml/2006/main" w="0">
-            <a:noFill/>
+            <a:solidFill>
+              <a:srgbClr val="2C6E73"/>
+            </a:solidFill>
           </a:ln>
         </p:spPr>
       </p:sp>
@@ -8297,19 +8299,19 @@
           <p:cNvPr id="12" name="">
             <a:extLst xmlns:a="http://schemas.openxmlformats.org/drawingml/2006/main">
               <a:ext uri="{FF2B5EF4-FFF2-40B4-BE49-F238E27FC236}">
-                <a16:creationId xmlns:a16="http://schemas.microsoft.com/office/drawing/2014/main" id="{770CE14A-4CD1-474B-9EF3-FC252AC9878E}"/>
-              </a:ext>
-            </a:extLst>
-          </p:cNvPr>
-          <p:cNvSpPr>
-            <a:spLocks xmlns:a="http://schemas.openxmlformats.org/drawingml/2006/main" noGrp="1"/>
-          </p:cNvSpPr>
-          <p:nvPr/>
-        </p:nvSpPr>
-        <p:spPr>
-          <a:xfrm xmlns:a="http://schemas.openxmlformats.org/drawingml/2006/main">
-            <a:off x="1000125" y="2276475"/>
-            <a:ext cx="476250" cy="419100"/>
+                <a16:creationId xmlns:a16="http://schemas.microsoft.com/office/drawing/2014/main" id="{C56840CC-0F82-40DA-8ECB-BC0111ED1647}"/>
+              </a:ext>
+            </a:extLst>
+          </p:cNvPr>
+          <p:cNvSpPr>
+            <a:spLocks xmlns:a="http://schemas.openxmlformats.org/drawingml/2006/main" noGrp="1"/>
+          </p:cNvSpPr>
+          <p:nvPr/>
+        </p:nvSpPr>
+        <p:spPr>
+          <a:xfrm xmlns:a="http://schemas.openxmlformats.org/drawingml/2006/main">
+            <a:off x="1162050" y="2200275"/>
+            <a:ext cx="400050" cy="400050"/>
           </a:xfrm>
           <a:prstGeom xmlns:a="http://schemas.openxmlformats.org/drawingml/2006/main" prst="rect">
             <a:avLst/>
@@ -8326,9 +8328,9 @@
           <a:lstStyle xmlns:a="http://schemas.openxmlformats.org/drawingml/2006/main"/>
           <a:p xmlns:a="http://schemas.openxmlformats.org/drawingml/2006/main">
             <a:pPr algn="ctr">
-              <a:defRPr sz="1350" b="1">
-                <a:solidFill>
-                  <a:srgbClr val="FFFFFF"/>
+              <a:defRPr sz="1125" b="1">
+                <a:solidFill>
+                  <a:srgbClr val="2C6E73"/>
                 </a:solidFill>
                 <a:latin typeface="Arial"/>
                 <a:ea typeface="Arial"/>
@@ -8336,9 +8338,9 @@
               </a:defRPr>
             </a:pPr>
             <a:r>
-              <a:rPr sz="1350" b="1">
-                <a:solidFill>
-                  <a:srgbClr val="FFFFFF"/>
+              <a:rPr sz="1125" b="1">
+                <a:solidFill>
+                  <a:srgbClr val="2C6E73"/>
                 </a:solidFill>
                 <a:latin typeface="Arial"/>
                 <a:ea typeface="Arial"/>
@@ -8354,19 +8356,19 @@
           <p:cNvPr id="13" name="">
             <a:extLst xmlns:a="http://schemas.openxmlformats.org/drawingml/2006/main">
               <a:ext uri="{FF2B5EF4-FFF2-40B4-BE49-F238E27FC236}">
-                <a16:creationId xmlns:a16="http://schemas.microsoft.com/office/drawing/2014/main" id="{49B674B5-86EA-4C4F-A55C-66A2B4C417B4}"/>
-              </a:ext>
-            </a:extLst>
-          </p:cNvPr>
-          <p:cNvSpPr>
-            <a:spLocks xmlns:a="http://schemas.openxmlformats.org/drawingml/2006/main" noGrp="1"/>
-          </p:cNvSpPr>
-          <p:nvPr/>
-        </p:nvSpPr>
-        <p:spPr>
-          <a:xfrm xmlns:a="http://schemas.openxmlformats.org/drawingml/2006/main">
-            <a:off x="1714500" y="2181225"/>
-            <a:ext cx="9429750" cy="609600"/>
+                <a16:creationId xmlns:a16="http://schemas.microsoft.com/office/drawing/2014/main" id="{20F41073-8EB9-44DC-8AD0-F451D47FDF3D}"/>
+              </a:ext>
+            </a:extLst>
+          </p:cNvPr>
+          <p:cNvSpPr>
+            <a:spLocks xmlns:a="http://schemas.openxmlformats.org/drawingml/2006/main" noGrp="1"/>
+          </p:cNvSpPr>
+          <p:nvPr/>
+        </p:nvSpPr>
+        <p:spPr>
+          <a:xfrm xmlns:a="http://schemas.openxmlformats.org/drawingml/2006/main">
+            <a:off x="1714500" y="2114550"/>
+            <a:ext cx="9525000" cy="809625"/>
           </a:xfrm>
           <a:prstGeom xmlns:a="http://schemas.openxmlformats.org/drawingml/2006/main" prst="rect">
             <a:avLst/>
@@ -8383,7 +8385,7 @@
           <a:lstStyle xmlns:a="http://schemas.openxmlformats.org/drawingml/2006/main"/>
           <a:p xmlns:a="http://schemas.openxmlformats.org/drawingml/2006/main">
             <a:pPr algn="l">
-              <a:defRPr sz="1500" b="0">
+              <a:defRPr sz="1725" b="0">
                 <a:solidFill>
                   <a:srgbClr val="17253A"/>
                 </a:solidFill>
@@ -8393,7 +8395,7 @@
               </a:defRPr>
             </a:pPr>
             <a:r>
-              <a:rPr sz="1500" b="0">
+              <a:rPr sz="1725" b="0">
                 <a:solidFill>
                   <a:srgbClr val="17253A"/>
                 </a:solidFill>
@@ -8401,7 +8403,7 @@
                 <a:ea typeface="Arial"/>
                 <a:cs typeface="Arial"/>
               </a:rPr>
-              <a:t>Identify the structure: Identify the multiplicative scale or total number of ratio parts.</a:t>
+              <a:t>6 people → 450 g</a:t>
             </a:r>
           </a:p>
         </p:txBody>
@@ -8411,28 +8413,30 @@
           <p:cNvPr id="14" name="">
             <a:extLst xmlns:a="http://schemas.openxmlformats.org/drawingml/2006/main">
               <a:ext uri="{FF2B5EF4-FFF2-40B4-BE49-F238E27FC236}">
-                <a16:creationId xmlns:a16="http://schemas.microsoft.com/office/drawing/2014/main" id="{BA880B8F-46E8-4D25-B6AF-243571BD2EC6}"/>
-              </a:ext>
-            </a:extLst>
-          </p:cNvPr>
-          <p:cNvSpPr>
-            <a:spLocks xmlns:a="http://schemas.openxmlformats.org/drawingml/2006/main" noGrp="1"/>
-          </p:cNvSpPr>
-          <p:nvPr/>
-        </p:nvSpPr>
-        <p:spPr>
-          <a:xfrm xmlns:a="http://schemas.openxmlformats.org/drawingml/2006/main">
-            <a:off x="1000125" y="2990850"/>
-            <a:ext cx="476250" cy="476250"/>
-          </a:xfrm>
-          <a:prstGeom xmlns:a="http://schemas.openxmlformats.org/drawingml/2006/main" prst="ellipse">
+                <a16:creationId xmlns:a16="http://schemas.microsoft.com/office/drawing/2014/main" id="{0B7C7196-7B76-4EB5-AD73-BFC473E3BC36}"/>
+              </a:ext>
+            </a:extLst>
+          </p:cNvPr>
+          <p:cNvSpPr>
+            <a:spLocks xmlns:a="http://schemas.openxmlformats.org/drawingml/2006/main" noGrp="1"/>
+          </p:cNvSpPr>
+          <p:nvPr/>
+        </p:nvSpPr>
+        <p:spPr>
+          <a:xfrm xmlns:a="http://schemas.openxmlformats.org/drawingml/2006/main">
+            <a:off x="1714500" y="2943225"/>
+            <a:ext cx="9334500" cy="9525"/>
+          </a:xfrm>
+          <a:prstGeom xmlns:a="http://schemas.openxmlformats.org/drawingml/2006/main" prst="rect">
             <a:avLst/>
           </a:prstGeom>
           <a:solidFill xmlns:a="http://schemas.openxmlformats.org/drawingml/2006/main">
-            <a:srgbClr val="2C6E73"/>
+            <a:srgbClr val="D9E0E6"/>
           </a:solidFill>
           <a:ln xmlns:a="http://schemas.openxmlformats.org/drawingml/2006/main" w="0">
-            <a:noFill/>
+            <a:solidFill>
+              <a:srgbClr val="D9E0E6"/>
+            </a:solidFill>
           </a:ln>
         </p:spPr>
       </p:sp>
@@ -8441,19 +8445,19 @@
           <p:cNvPr id="15" name="">
             <a:extLst xmlns:a="http://schemas.openxmlformats.org/drawingml/2006/main">
               <a:ext uri="{FF2B5EF4-FFF2-40B4-BE49-F238E27FC236}">
-                <a16:creationId xmlns:a16="http://schemas.microsoft.com/office/drawing/2014/main" id="{89AE03E6-BB8D-45C8-92FF-82727D3638DC}"/>
-              </a:ext>
-            </a:extLst>
-          </p:cNvPr>
-          <p:cNvSpPr>
-            <a:spLocks xmlns:a="http://schemas.openxmlformats.org/drawingml/2006/main" noGrp="1"/>
-          </p:cNvSpPr>
-          <p:nvPr/>
-        </p:nvSpPr>
-        <p:spPr>
-          <a:xfrm xmlns:a="http://schemas.openxmlformats.org/drawingml/2006/main">
-            <a:off x="1000125" y="3019425"/>
-            <a:ext cx="476250" cy="419100"/>
+                <a16:creationId xmlns:a16="http://schemas.microsoft.com/office/drawing/2014/main" id="{137DB0BD-B60C-4CDC-9D34-FA9C369E44C0}"/>
+              </a:ext>
+            </a:extLst>
+          </p:cNvPr>
+          <p:cNvSpPr>
+            <a:spLocks xmlns:a="http://schemas.openxmlformats.org/drawingml/2006/main" noGrp="1"/>
+          </p:cNvSpPr>
+          <p:nvPr/>
+        </p:nvSpPr>
+        <p:spPr>
+          <a:xfrm xmlns:a="http://schemas.openxmlformats.org/drawingml/2006/main">
+            <a:off x="1162050" y="3076575"/>
+            <a:ext cx="400050" cy="400050"/>
           </a:xfrm>
           <a:prstGeom xmlns:a="http://schemas.openxmlformats.org/drawingml/2006/main" prst="rect">
             <a:avLst/>
@@ -8470,9 +8474,9 @@
           <a:lstStyle xmlns:a="http://schemas.openxmlformats.org/drawingml/2006/main"/>
           <a:p xmlns:a="http://schemas.openxmlformats.org/drawingml/2006/main">
             <a:pPr algn="ctr">
-              <a:defRPr sz="1350" b="1">
-                <a:solidFill>
-                  <a:srgbClr val="FFFFFF"/>
+              <a:defRPr sz="1125" b="1">
+                <a:solidFill>
+                  <a:srgbClr val="2C6E73"/>
                 </a:solidFill>
                 <a:latin typeface="Arial"/>
                 <a:ea typeface="Arial"/>
@@ -8480,9 +8484,9 @@
               </a:defRPr>
             </a:pPr>
             <a:r>
-              <a:rPr sz="1350" b="1">
-                <a:solidFill>
-                  <a:srgbClr val="FFFFFF"/>
+              <a:rPr sz="1125" b="1">
+                <a:solidFill>
+                  <a:srgbClr val="2C6E73"/>
                 </a:solidFill>
                 <a:latin typeface="Arial"/>
                 <a:ea typeface="Arial"/>
@@ -8498,19 +8502,19 @@
           <p:cNvPr id="16" name="">
             <a:extLst xmlns:a="http://schemas.openxmlformats.org/drawingml/2006/main">
               <a:ext uri="{FF2B5EF4-FFF2-40B4-BE49-F238E27FC236}">
-                <a16:creationId xmlns:a16="http://schemas.microsoft.com/office/drawing/2014/main" id="{86A59237-AD80-49AE-A70A-5E24AF0C0A8C}"/>
-              </a:ext>
-            </a:extLst>
-          </p:cNvPr>
-          <p:cNvSpPr>
-            <a:spLocks xmlns:a="http://schemas.openxmlformats.org/drawingml/2006/main" noGrp="1"/>
-          </p:cNvSpPr>
-          <p:nvPr/>
-        </p:nvSpPr>
-        <p:spPr>
-          <a:xfrm xmlns:a="http://schemas.openxmlformats.org/drawingml/2006/main">
-            <a:off x="1714500" y="2924175"/>
-            <a:ext cx="9429750" cy="609600"/>
+                <a16:creationId xmlns:a16="http://schemas.microsoft.com/office/drawing/2014/main" id="{6E345C92-D98A-4726-A8A4-0825112B628C}"/>
+              </a:ext>
+            </a:extLst>
+          </p:cNvPr>
+          <p:cNvSpPr>
+            <a:spLocks xmlns:a="http://schemas.openxmlformats.org/drawingml/2006/main" noGrp="1"/>
+          </p:cNvSpPr>
+          <p:nvPr/>
+        </p:nvSpPr>
+        <p:spPr>
+          <a:xfrm xmlns:a="http://schemas.openxmlformats.org/drawingml/2006/main">
+            <a:off x="1714500" y="2990850"/>
+            <a:ext cx="9525000" cy="809625"/>
           </a:xfrm>
           <a:prstGeom xmlns:a="http://schemas.openxmlformats.org/drawingml/2006/main" prst="rect">
             <a:avLst/>
@@ -8527,7 +8531,7 @@
           <a:lstStyle xmlns:a="http://schemas.openxmlformats.org/drawingml/2006/main"/>
           <a:p xmlns:a="http://schemas.openxmlformats.org/drawingml/2006/main">
             <a:pPr algn="l">
-              <a:defRPr sz="1500" b="0">
+              <a:defRPr sz="1725" b="0">
                 <a:solidFill>
                   <a:srgbClr val="17253A"/>
                 </a:solidFill>
@@ -8537,7 +8541,7 @@
               </a:defRPr>
             </a:pPr>
             <a:r>
-              <a:rPr sz="1500" b="0">
+              <a:rPr sz="1725" b="0">
                 <a:solidFill>
                   <a:srgbClr val="17253A"/>
                 </a:solidFill>
@@ -8545,7 +8549,7 @@
                 <a:ea typeface="Arial"/>
                 <a:cs typeface="Arial"/>
               </a:rPr>
-              <a:t>Set up the method: Apply the factor consistently or find the value of one part.</a:t>
+              <a:t>1 person → 450 ÷ 6 = 75 g</a:t>
             </a:r>
           </a:p>
         </p:txBody>
@@ -8555,28 +8559,30 @@
           <p:cNvPr id="17" name="">
             <a:extLst xmlns:a="http://schemas.openxmlformats.org/drawingml/2006/main">
               <a:ext uri="{FF2B5EF4-FFF2-40B4-BE49-F238E27FC236}">
-                <a16:creationId xmlns:a16="http://schemas.microsoft.com/office/drawing/2014/main" id="{1FDF3EE3-0079-4CEB-B076-CDCC4BACDE63}"/>
-              </a:ext>
-            </a:extLst>
-          </p:cNvPr>
-          <p:cNvSpPr>
-            <a:spLocks xmlns:a="http://schemas.openxmlformats.org/drawingml/2006/main" noGrp="1"/>
-          </p:cNvSpPr>
-          <p:nvPr/>
-        </p:nvSpPr>
-        <p:spPr>
-          <a:xfrm xmlns:a="http://schemas.openxmlformats.org/drawingml/2006/main">
-            <a:off x="1000125" y="3733800"/>
-            <a:ext cx="476250" cy="476250"/>
-          </a:xfrm>
-          <a:prstGeom xmlns:a="http://schemas.openxmlformats.org/drawingml/2006/main" prst="ellipse">
+                <a16:creationId xmlns:a16="http://schemas.microsoft.com/office/drawing/2014/main" id="{C85707B5-8457-46C8-BEFC-C9FEF88198B6}"/>
+              </a:ext>
+            </a:extLst>
+          </p:cNvPr>
+          <p:cNvSpPr>
+            <a:spLocks xmlns:a="http://schemas.openxmlformats.org/drawingml/2006/main" noGrp="1"/>
+          </p:cNvSpPr>
+          <p:nvPr/>
+        </p:nvSpPr>
+        <p:spPr>
+          <a:xfrm xmlns:a="http://schemas.openxmlformats.org/drawingml/2006/main">
+            <a:off x="1714500" y="3819525"/>
+            <a:ext cx="9334500" cy="9525"/>
+          </a:xfrm>
+          <a:prstGeom xmlns:a="http://schemas.openxmlformats.org/drawingml/2006/main" prst="rect">
             <a:avLst/>
           </a:prstGeom>
           <a:solidFill xmlns:a="http://schemas.openxmlformats.org/drawingml/2006/main">
-            <a:srgbClr val="2C6E73"/>
+            <a:srgbClr val="D9E0E6"/>
           </a:solidFill>
           <a:ln xmlns:a="http://schemas.openxmlformats.org/drawingml/2006/main" w="0">
-            <a:noFill/>
+            <a:solidFill>
+              <a:srgbClr val="D9E0E6"/>
+            </a:solidFill>
           </a:ln>
         </p:spPr>
       </p:sp>
@@ -8585,19 +8591,19 @@
           <p:cNvPr id="18" name="">
             <a:extLst xmlns:a="http://schemas.openxmlformats.org/drawingml/2006/main">
               <a:ext uri="{FF2B5EF4-FFF2-40B4-BE49-F238E27FC236}">
-                <a16:creationId xmlns:a16="http://schemas.microsoft.com/office/drawing/2014/main" id="{B4E86319-B853-43F6-A79D-E99765AA251C}"/>
-              </a:ext>
-            </a:extLst>
-          </p:cNvPr>
-          <p:cNvSpPr>
-            <a:spLocks xmlns:a="http://schemas.openxmlformats.org/drawingml/2006/main" noGrp="1"/>
-          </p:cNvSpPr>
-          <p:nvPr/>
-        </p:nvSpPr>
-        <p:spPr>
-          <a:xfrm xmlns:a="http://schemas.openxmlformats.org/drawingml/2006/main">
-            <a:off x="1000125" y="3762375"/>
-            <a:ext cx="476250" cy="419100"/>
+                <a16:creationId xmlns:a16="http://schemas.microsoft.com/office/drawing/2014/main" id="{C230996D-1864-46DD-9C94-4C807A8192A6}"/>
+              </a:ext>
+            </a:extLst>
+          </p:cNvPr>
+          <p:cNvSpPr>
+            <a:spLocks xmlns:a="http://schemas.openxmlformats.org/drawingml/2006/main" noGrp="1"/>
+          </p:cNvSpPr>
+          <p:nvPr/>
+        </p:nvSpPr>
+        <p:spPr>
+          <a:xfrm xmlns:a="http://schemas.openxmlformats.org/drawingml/2006/main">
+            <a:off x="1162050" y="3952875"/>
+            <a:ext cx="400050" cy="400050"/>
           </a:xfrm>
           <a:prstGeom xmlns:a="http://schemas.openxmlformats.org/drawingml/2006/main" prst="rect">
             <a:avLst/>
@@ -8614,9 +8620,9 @@
           <a:lstStyle xmlns:a="http://schemas.openxmlformats.org/drawingml/2006/main"/>
           <a:p xmlns:a="http://schemas.openxmlformats.org/drawingml/2006/main">
             <a:pPr algn="ctr">
-              <a:defRPr sz="1350" b="1">
-                <a:solidFill>
-                  <a:srgbClr val="FFFFFF"/>
+              <a:defRPr sz="1125" b="1">
+                <a:solidFill>
+                  <a:srgbClr val="2C6E73"/>
                 </a:solidFill>
                 <a:latin typeface="Arial"/>
                 <a:ea typeface="Arial"/>
@@ -8624,9 +8630,9 @@
               </a:defRPr>
             </a:pPr>
             <a:r>
-              <a:rPr sz="1350" b="1">
-                <a:solidFill>
-                  <a:srgbClr val="FFFFFF"/>
+              <a:rPr sz="1125" b="1">
+                <a:solidFill>
+                  <a:srgbClr val="2C6E73"/>
                 </a:solidFill>
                 <a:latin typeface="Arial"/>
                 <a:ea typeface="Arial"/>
@@ -8642,19 +8648,19 @@
           <p:cNvPr id="19" name="">
             <a:extLst xmlns:a="http://schemas.openxmlformats.org/drawingml/2006/main">
               <a:ext uri="{FF2B5EF4-FFF2-40B4-BE49-F238E27FC236}">
-                <a16:creationId xmlns:a16="http://schemas.microsoft.com/office/drawing/2014/main" id="{04409D73-668C-4750-9F2F-1DE32CA2CC37}"/>
-              </a:ext>
-            </a:extLst>
-          </p:cNvPr>
-          <p:cNvSpPr>
-            <a:spLocks xmlns:a="http://schemas.openxmlformats.org/drawingml/2006/main" noGrp="1"/>
-          </p:cNvSpPr>
-          <p:nvPr/>
-        </p:nvSpPr>
-        <p:spPr>
-          <a:xfrm xmlns:a="http://schemas.openxmlformats.org/drawingml/2006/main">
-            <a:off x="1714500" y="3667125"/>
-            <a:ext cx="9429750" cy="609600"/>
+                <a16:creationId xmlns:a16="http://schemas.microsoft.com/office/drawing/2014/main" id="{C95932EA-97E0-47F4-8EE4-5B0DEBC61FDF}"/>
+              </a:ext>
+            </a:extLst>
+          </p:cNvPr>
+          <p:cNvSpPr>
+            <a:spLocks xmlns:a="http://schemas.openxmlformats.org/drawingml/2006/main" noGrp="1"/>
+          </p:cNvSpPr>
+          <p:nvPr/>
+        </p:nvSpPr>
+        <p:spPr>
+          <a:xfrm xmlns:a="http://schemas.openxmlformats.org/drawingml/2006/main">
+            <a:off x="1714500" y="3867150"/>
+            <a:ext cx="9525000" cy="809625"/>
           </a:xfrm>
           <a:prstGeom xmlns:a="http://schemas.openxmlformats.org/drawingml/2006/main" prst="rect">
             <a:avLst/>
@@ -8671,7 +8677,7 @@
           <a:lstStyle xmlns:a="http://schemas.openxmlformats.org/drawingml/2006/main"/>
           <a:p xmlns:a="http://schemas.openxmlformats.org/drawingml/2006/main">
             <a:pPr algn="l">
-              <a:defRPr sz="1500" b="0">
+              <a:defRPr sz="1725" b="0">
                 <a:solidFill>
                   <a:srgbClr val="17253A"/>
                 </a:solidFill>
@@ -8681,7 +8687,7 @@
               </a:defRPr>
             </a:pPr>
             <a:r>
-              <a:rPr sz="1500" b="0">
+              <a:rPr sz="1725" b="0">
                 <a:solidFill>
                   <a:srgbClr val="17253A"/>
                 </a:solidFill>
@@ -8689,7 +8695,7 @@
                 <a:ea typeface="Arial"/>
                 <a:cs typeface="Arial"/>
               </a:rPr>
-              <a:t>Complete the calculation: 1,050 g.</a:t>
+              <a:t>14 people → 75 × 14</a:t>
             </a:r>
           </a:p>
         </p:txBody>
@@ -8699,28 +8705,30 @@
           <p:cNvPr id="20" name="">
             <a:extLst xmlns:a="http://schemas.openxmlformats.org/drawingml/2006/main">
               <a:ext uri="{FF2B5EF4-FFF2-40B4-BE49-F238E27FC236}">
-                <a16:creationId xmlns:a16="http://schemas.microsoft.com/office/drawing/2014/main" id="{0166BB4D-83E6-400D-AD2B-899BBD627E3C}"/>
-              </a:ext>
-            </a:extLst>
-          </p:cNvPr>
-          <p:cNvSpPr>
-            <a:spLocks xmlns:a="http://schemas.openxmlformats.org/drawingml/2006/main" noGrp="1"/>
-          </p:cNvSpPr>
-          <p:nvPr/>
-        </p:nvSpPr>
-        <p:spPr>
-          <a:xfrm xmlns:a="http://schemas.openxmlformats.org/drawingml/2006/main">
-            <a:off x="1000125" y="4476750"/>
-            <a:ext cx="476250" cy="476250"/>
-          </a:xfrm>
-          <a:prstGeom xmlns:a="http://schemas.openxmlformats.org/drawingml/2006/main" prst="ellipse">
+                <a16:creationId xmlns:a16="http://schemas.microsoft.com/office/drawing/2014/main" id="{06EDA9B3-C38C-4EC5-ADEF-4DB82B845AEE}"/>
+              </a:ext>
+            </a:extLst>
+          </p:cNvPr>
+          <p:cNvSpPr>
+            <a:spLocks xmlns:a="http://schemas.openxmlformats.org/drawingml/2006/main" noGrp="1"/>
+          </p:cNvSpPr>
+          <p:nvPr/>
+        </p:nvSpPr>
+        <p:spPr>
+          <a:xfrm xmlns:a="http://schemas.openxmlformats.org/drawingml/2006/main">
+            <a:off x="1714500" y="4695825"/>
+            <a:ext cx="9334500" cy="9525"/>
+          </a:xfrm>
+          <a:prstGeom xmlns:a="http://schemas.openxmlformats.org/drawingml/2006/main" prst="rect">
             <a:avLst/>
           </a:prstGeom>
           <a:solidFill xmlns:a="http://schemas.openxmlformats.org/drawingml/2006/main">
-            <a:srgbClr val="2C6E73"/>
+            <a:srgbClr val="D9E0E6"/>
           </a:solidFill>
           <a:ln xmlns:a="http://schemas.openxmlformats.org/drawingml/2006/main" w="0">
-            <a:noFill/>
+            <a:solidFill>
+              <a:srgbClr val="D9E0E6"/>
+            </a:solidFill>
           </a:ln>
         </p:spPr>
       </p:sp>
@@ -8729,19 +8737,19 @@
           <p:cNvPr id="21" name="">
             <a:extLst xmlns:a="http://schemas.openxmlformats.org/drawingml/2006/main">
               <a:ext uri="{FF2B5EF4-FFF2-40B4-BE49-F238E27FC236}">
-                <a16:creationId xmlns:a16="http://schemas.microsoft.com/office/drawing/2014/main" id="{95C3C1A1-B63E-4D80-8CD8-94FC43753B68}"/>
-              </a:ext>
-            </a:extLst>
-          </p:cNvPr>
-          <p:cNvSpPr>
-            <a:spLocks xmlns:a="http://schemas.openxmlformats.org/drawingml/2006/main" noGrp="1"/>
-          </p:cNvSpPr>
-          <p:nvPr/>
-        </p:nvSpPr>
-        <p:spPr>
-          <a:xfrm xmlns:a="http://schemas.openxmlformats.org/drawingml/2006/main">
-            <a:off x="1000125" y="4505325"/>
-            <a:ext cx="476250" cy="419100"/>
+                <a16:creationId xmlns:a16="http://schemas.microsoft.com/office/drawing/2014/main" id="{8B3CB9C9-7254-44A0-82B3-191EC00DF62B}"/>
+              </a:ext>
+            </a:extLst>
+          </p:cNvPr>
+          <p:cNvSpPr>
+            <a:spLocks xmlns:a="http://schemas.openxmlformats.org/drawingml/2006/main" noGrp="1"/>
+          </p:cNvSpPr>
+          <p:nvPr/>
+        </p:nvSpPr>
+        <p:spPr>
+          <a:xfrm xmlns:a="http://schemas.openxmlformats.org/drawingml/2006/main">
+            <a:off x="1162050" y="4829175"/>
+            <a:ext cx="400050" cy="400050"/>
           </a:xfrm>
           <a:prstGeom xmlns:a="http://schemas.openxmlformats.org/drawingml/2006/main" prst="rect">
             <a:avLst/>
@@ -8758,9 +8766,9 @@
           <a:lstStyle xmlns:a="http://schemas.openxmlformats.org/drawingml/2006/main"/>
           <a:p xmlns:a="http://schemas.openxmlformats.org/drawingml/2006/main">
             <a:pPr algn="ctr">
-              <a:defRPr sz="1350" b="1">
-                <a:solidFill>
-                  <a:srgbClr val="FFFFFF"/>
+              <a:defRPr sz="1125" b="1">
+                <a:solidFill>
+                  <a:srgbClr val="2F785D"/>
                 </a:solidFill>
                 <a:latin typeface="Arial"/>
                 <a:ea typeface="Arial"/>
@@ -8768,9 +8776,9 @@
               </a:defRPr>
             </a:pPr>
             <a:r>
-              <a:rPr sz="1350" b="1">
-                <a:solidFill>
-                  <a:srgbClr val="FFFFFF"/>
+              <a:rPr sz="1125" b="1">
+                <a:solidFill>
+                  <a:srgbClr val="2F785D"/>
                 </a:solidFill>
                 <a:latin typeface="Arial"/>
                 <a:ea typeface="Arial"/>
@@ -8786,19 +8794,19 @@
           <p:cNvPr id="22" name="">
             <a:extLst xmlns:a="http://schemas.openxmlformats.org/drawingml/2006/main">
               <a:ext uri="{FF2B5EF4-FFF2-40B4-BE49-F238E27FC236}">
-                <a16:creationId xmlns:a16="http://schemas.microsoft.com/office/drawing/2014/main" id="{49EFDF28-1845-4AA8-8CCA-A49D1BB878BA}"/>
-              </a:ext>
-            </a:extLst>
-          </p:cNvPr>
-          <p:cNvSpPr>
-            <a:spLocks xmlns:a="http://schemas.openxmlformats.org/drawingml/2006/main" noGrp="1"/>
-          </p:cNvSpPr>
-          <p:nvPr/>
-        </p:nvSpPr>
-        <p:spPr>
-          <a:xfrm xmlns:a="http://schemas.openxmlformats.org/drawingml/2006/main">
-            <a:off x="1714500" y="4410075"/>
-            <a:ext cx="9429750" cy="609600"/>
+                <a16:creationId xmlns:a16="http://schemas.microsoft.com/office/drawing/2014/main" id="{4715D10B-A563-45CD-958D-5B44FB516D24}"/>
+              </a:ext>
+            </a:extLst>
+          </p:cNvPr>
+          <p:cNvSpPr>
+            <a:spLocks xmlns:a="http://schemas.openxmlformats.org/drawingml/2006/main" noGrp="1"/>
+          </p:cNvSpPr>
+          <p:nvPr/>
+        </p:nvSpPr>
+        <p:spPr>
+          <a:xfrm xmlns:a="http://schemas.openxmlformats.org/drawingml/2006/main">
+            <a:off x="1714500" y="4743450"/>
+            <a:ext cx="9525000" cy="809625"/>
           </a:xfrm>
           <a:prstGeom xmlns:a="http://schemas.openxmlformats.org/drawingml/2006/main" prst="rect">
             <a:avLst/>
@@ -8815,7 +8823,7 @@
           <a:lstStyle xmlns:a="http://schemas.openxmlformats.org/drawingml/2006/main"/>
           <a:p xmlns:a="http://schemas.openxmlformats.org/drawingml/2006/main">
             <a:pPr algn="l">
-              <a:defRPr sz="1500" b="1">
+              <a:defRPr sz="1725" b="1">
                 <a:solidFill>
                   <a:srgbClr val="2F785D"/>
                 </a:solidFill>
@@ -8825,7 +8833,7 @@
               </a:defRPr>
             </a:pPr>
             <a:r>
-              <a:rPr sz="1500" b="1">
+              <a:rPr sz="1725" b="1">
                 <a:solidFill>
                   <a:srgbClr val="2F785D"/>
                 </a:solidFill>
@@ -8833,7 +8841,7 @@
                 <a:ea typeface="Arial"/>
                 <a:cs typeface="Arial"/>
               </a:rPr>
-              <a:t>Check the result: Recombine and check the total or corresponding measure.</a:t>
+              <a:t>1,050 g</a:t>
             </a:r>
           </a:p>
         </p:txBody>
@@ -8841,7 +8849,7 @@
     </p:spTree>
     <p:extLst>
       <p:ext uri="{BB962C8B-B14F-4D97-AF65-F5344CB8AC3E}">
-        <p14:creationId xmlns:p14="http://schemas.microsoft.com/office/powerpoint/2010/main" val="448626141"/>
+        <p14:creationId xmlns:p14="http://schemas.microsoft.com/office/powerpoint/2010/main" val="1371272853"/>
       </p:ext>
     </p:extLst>
   </p:cSld>
@@ -9134,7 +9142,7 @@
           <p:cNvPr id="15" name="">
             <a:extLst xmlns:a="http://schemas.openxmlformats.org/drawingml/2006/main">
               <a:ext uri="{FF2B5EF4-FFF2-40B4-BE49-F238E27FC236}">
-                <a16:creationId xmlns:a16="http://schemas.microsoft.com/office/drawing/2014/main" id="{4A60BAC3-2392-43B5-9E27-0CD5FB17E05C}"/>
+                <a16:creationId xmlns:a16="http://schemas.microsoft.com/office/drawing/2014/main" id="{9E8A9AE0-D520-4E90-BC84-D1F8C0CF4223}"/>
               </a:ext>
             </a:extLst>
           </p:cNvPr>
@@ -9166,7 +9174,7 @@
           <p:cNvPr id="2" name="">
             <a:extLst xmlns:a="http://schemas.openxmlformats.org/drawingml/2006/main">
               <a:ext uri="{FF2B5EF4-FFF2-40B4-BE49-F238E27FC236}">
-                <a16:creationId xmlns:a16="http://schemas.microsoft.com/office/drawing/2014/main" id="{29087F33-B298-4AF2-9271-CD2900DB7841}"/>
+                <a16:creationId xmlns:a16="http://schemas.microsoft.com/office/drawing/2014/main" id="{54FFBF75-DE6A-4025-BA6C-22E4B4615348}"/>
               </a:ext>
             </a:extLst>
           </p:cNvPr>
@@ -9223,7 +9231,7 @@
           <p:cNvPr id="3" name="">
             <a:extLst xmlns:a="http://schemas.openxmlformats.org/drawingml/2006/main">
               <a:ext uri="{FF2B5EF4-FFF2-40B4-BE49-F238E27FC236}">
-                <a16:creationId xmlns:a16="http://schemas.microsoft.com/office/drawing/2014/main" id="{C38E71C0-F46D-456A-98BD-927E661CB48A}"/>
+                <a16:creationId xmlns:a16="http://schemas.microsoft.com/office/drawing/2014/main" id="{6E753711-A409-476B-A392-67D3C3EE81D1}"/>
               </a:ext>
             </a:extLst>
           </p:cNvPr>
@@ -9255,7 +9263,7 @@
           <p:cNvPr id="4" name="">
             <a:extLst xmlns:a="http://schemas.openxmlformats.org/drawingml/2006/main">
               <a:ext uri="{FF2B5EF4-FFF2-40B4-BE49-F238E27FC236}">
-                <a16:creationId xmlns:a16="http://schemas.microsoft.com/office/drawing/2014/main" id="{F3C53CD3-8B41-4819-8C69-9B182A0672B2}"/>
+                <a16:creationId xmlns:a16="http://schemas.microsoft.com/office/drawing/2014/main" id="{6113769F-9FBB-4D0E-A936-28AFEF473EAD}"/>
               </a:ext>
             </a:extLst>
           </p:cNvPr>
@@ -9312,7 +9320,7 @@
           <p:cNvPr id="5" name="">
             <a:extLst xmlns:a="http://schemas.openxmlformats.org/drawingml/2006/main">
               <a:ext uri="{FF2B5EF4-FFF2-40B4-BE49-F238E27FC236}">
-                <a16:creationId xmlns:a16="http://schemas.microsoft.com/office/drawing/2014/main" id="{10545D0C-AE2C-4E33-9279-88B0BA6A01E9}"/>
+                <a16:creationId xmlns:a16="http://schemas.microsoft.com/office/drawing/2014/main" id="{C45B1757-801B-4F26-B7A6-E927448FCE95}"/>
               </a:ext>
             </a:extLst>
           </p:cNvPr>
@@ -9369,7 +9377,7 @@
           <p:cNvPr id="6" name="">
             <a:extLst xmlns:a="http://schemas.openxmlformats.org/drawingml/2006/main">
               <a:ext uri="{FF2B5EF4-FFF2-40B4-BE49-F238E27FC236}">
-                <a16:creationId xmlns:a16="http://schemas.microsoft.com/office/drawing/2014/main" id="{5269440F-4114-4803-9162-FFD4092BA939}"/>
+                <a16:creationId xmlns:a16="http://schemas.microsoft.com/office/drawing/2014/main" id="{2B13974A-06D5-481B-9001-BB7BAF4EE461}"/>
               </a:ext>
             </a:extLst>
           </p:cNvPr>
@@ -9426,7 +9434,7 @@
           <p:cNvPr id="7" name="">
             <a:extLst xmlns:a="http://schemas.openxmlformats.org/drawingml/2006/main">
               <a:ext uri="{FF2B5EF4-FFF2-40B4-BE49-F238E27FC236}">
-                <a16:creationId xmlns:a16="http://schemas.microsoft.com/office/drawing/2014/main" id="{98B8C94A-699A-4015-A521-EE2F78ACC532}"/>
+                <a16:creationId xmlns:a16="http://schemas.microsoft.com/office/drawing/2014/main" id="{817365E4-733D-478B-85E3-0E632CB452E5}"/>
               </a:ext>
             </a:extLst>
           </p:cNvPr>
@@ -9458,7 +9466,7 @@
           <p:cNvPr id="8" name="">
             <a:extLst xmlns:a="http://schemas.openxmlformats.org/drawingml/2006/main">
               <a:ext uri="{FF2B5EF4-FFF2-40B4-BE49-F238E27FC236}">
-                <a16:creationId xmlns:a16="http://schemas.microsoft.com/office/drawing/2014/main" id="{04170500-9B27-4774-BECC-55C7C474AC2F}"/>
+                <a16:creationId xmlns:a16="http://schemas.microsoft.com/office/drawing/2014/main" id="{1EC830FA-258F-4F3F-A9D2-80815C4694C8}"/>
               </a:ext>
             </a:extLst>
           </p:cNvPr>
@@ -9515,7 +9523,7 @@
           <p:cNvPr id="9" name="">
             <a:extLst xmlns:a="http://schemas.openxmlformats.org/drawingml/2006/main">
               <a:ext uri="{FF2B5EF4-FFF2-40B4-BE49-F238E27FC236}">
-                <a16:creationId xmlns:a16="http://schemas.microsoft.com/office/drawing/2014/main" id="{8F3317C5-B079-4ECA-A250-72681A0A9BAB}"/>
+                <a16:creationId xmlns:a16="http://schemas.microsoft.com/office/drawing/2014/main" id="{E09BD4F6-F94F-4D05-9867-6AFF6F7ECBAB}"/>
               </a:ext>
             </a:extLst>
           </p:cNvPr>
@@ -9572,7 +9580,7 @@
           <p:cNvPr id="10" name="">
             <a:extLst xmlns:a="http://schemas.openxmlformats.org/drawingml/2006/main">
               <a:ext uri="{FF2B5EF4-FFF2-40B4-BE49-F238E27FC236}">
-                <a16:creationId xmlns:a16="http://schemas.microsoft.com/office/drawing/2014/main" id="{B86C2957-D92E-4EBC-8562-1BBAD80FEB7D}"/>
+                <a16:creationId xmlns:a16="http://schemas.microsoft.com/office/drawing/2014/main" id="{01B1A8BE-AB20-40B6-B08C-900DFF446649}"/>
               </a:ext>
             </a:extLst>
           </p:cNvPr>
@@ -9629,7 +9637,7 @@
           <p:cNvPr id="11" name="">
             <a:extLst xmlns:a="http://schemas.openxmlformats.org/drawingml/2006/main">
               <a:ext uri="{FF2B5EF4-FFF2-40B4-BE49-F238E27FC236}">
-                <a16:creationId xmlns:a16="http://schemas.microsoft.com/office/drawing/2014/main" id="{C0178AB1-7904-47E9-AEB4-5E4FB3D82078}"/>
+                <a16:creationId xmlns:a16="http://schemas.microsoft.com/office/drawing/2014/main" id="{A4D76BE1-0F53-4633-A3AA-615B726B6E05}"/>
               </a:ext>
             </a:extLst>
           </p:cNvPr>
@@ -9686,7 +9694,7 @@
           <p:cNvPr id="12" name="">
             <a:extLst xmlns:a="http://schemas.openxmlformats.org/drawingml/2006/main">
               <a:ext uri="{FF2B5EF4-FFF2-40B4-BE49-F238E27FC236}">
-                <a16:creationId xmlns:a16="http://schemas.microsoft.com/office/drawing/2014/main" id="{7BDDB4FA-424B-48E5-841E-CF50516AFDBE}"/>
+                <a16:creationId xmlns:a16="http://schemas.microsoft.com/office/drawing/2014/main" id="{40B5EF31-8BDB-4A3D-A96E-CDF3A92C0AB7}"/>
               </a:ext>
             </a:extLst>
           </p:cNvPr>
@@ -9718,7 +9726,7 @@
           <p:cNvPr id="13" name="">
             <a:extLst xmlns:a="http://schemas.openxmlformats.org/drawingml/2006/main">
               <a:ext uri="{FF2B5EF4-FFF2-40B4-BE49-F238E27FC236}">
-                <a16:creationId xmlns:a16="http://schemas.microsoft.com/office/drawing/2014/main" id="{F1843CA2-D4F1-462D-BF2C-DE261EB8B0D5}"/>
+                <a16:creationId xmlns:a16="http://schemas.microsoft.com/office/drawing/2014/main" id="{69758664-9D16-45B6-BC95-52AB6BF01011}"/>
               </a:ext>
             </a:extLst>
           </p:cNvPr>
@@ -9775,7 +9783,7 @@
           <p:cNvPr id="14" name="">
             <a:extLst xmlns:a="http://schemas.openxmlformats.org/drawingml/2006/main">
               <a:ext uri="{FF2B5EF4-FFF2-40B4-BE49-F238E27FC236}">
-                <a16:creationId xmlns:a16="http://schemas.microsoft.com/office/drawing/2014/main" id="{0DF92253-71BF-473B-A24D-90A04A11426C}"/>
+                <a16:creationId xmlns:a16="http://schemas.microsoft.com/office/drawing/2014/main" id="{DE2ACDAB-93C6-4510-87CD-1ACD7DB4200F}"/>
               </a:ext>
             </a:extLst>
           </p:cNvPr>
@@ -9830,7 +9838,7 @@
     </p:spTree>
     <p:extLst>
       <p:ext uri="{BB962C8B-B14F-4D97-AF65-F5344CB8AC3E}">
-        <p14:creationId xmlns:p14="http://schemas.microsoft.com/office/powerpoint/2010/main" val="270534389"/>
+        <p14:creationId xmlns:p14="http://schemas.microsoft.com/office/powerpoint/2010/main" val="482017242"/>
       </p:ext>
     </p:extLst>
   </p:cSld>
@@ -10031,7 +10039,7 @@
           <p:cNvPr id="16" name="">
             <a:extLst xmlns:a="http://schemas.openxmlformats.org/drawingml/2006/main">
               <a:ext uri="{FF2B5EF4-FFF2-40B4-BE49-F238E27FC236}">
-                <a16:creationId xmlns:a16="http://schemas.microsoft.com/office/drawing/2014/main" id="{76D62602-3FBB-4E7B-9EF1-E97A59A7E9B2}"/>
+                <a16:creationId xmlns:a16="http://schemas.microsoft.com/office/drawing/2014/main" id="{F7CC0C2B-A3A7-418B-8659-107A230479EC}"/>
               </a:ext>
             </a:extLst>
           </p:cNvPr>
@@ -10063,7 +10071,7 @@
           <p:cNvPr id="2" name="">
             <a:extLst xmlns:a="http://schemas.openxmlformats.org/drawingml/2006/main">
               <a:ext uri="{FF2B5EF4-FFF2-40B4-BE49-F238E27FC236}">
-                <a16:creationId xmlns:a16="http://schemas.microsoft.com/office/drawing/2014/main" id="{AE37AE25-244F-44CB-8B49-E1C722615400}"/>
+                <a16:creationId xmlns:a16="http://schemas.microsoft.com/office/drawing/2014/main" id="{B878F65A-6775-4FFA-9996-29A41306D866}"/>
               </a:ext>
             </a:extLst>
           </p:cNvPr>
@@ -10120,7 +10128,7 @@
           <p:cNvPr id="3" name="">
             <a:extLst xmlns:a="http://schemas.openxmlformats.org/drawingml/2006/main">
               <a:ext uri="{FF2B5EF4-FFF2-40B4-BE49-F238E27FC236}">
-                <a16:creationId xmlns:a16="http://schemas.microsoft.com/office/drawing/2014/main" id="{71A5FBB9-5892-451D-9081-CDBD854363AB}"/>
+                <a16:creationId xmlns:a16="http://schemas.microsoft.com/office/drawing/2014/main" id="{06B00962-8DF2-4FA5-8A00-458F253F79AF}"/>
               </a:ext>
             </a:extLst>
           </p:cNvPr>
@@ -10152,7 +10160,7 @@
           <p:cNvPr id="4" name="">
             <a:extLst xmlns:a="http://schemas.openxmlformats.org/drawingml/2006/main">
               <a:ext uri="{FF2B5EF4-FFF2-40B4-BE49-F238E27FC236}">
-                <a16:creationId xmlns:a16="http://schemas.microsoft.com/office/drawing/2014/main" id="{A8DF44D1-C1DA-4FCA-A5D7-A2491D00606E}"/>
+                <a16:creationId xmlns:a16="http://schemas.microsoft.com/office/drawing/2014/main" id="{1BFEEADA-5F01-48D2-96C3-3EA4CBB03483}"/>
               </a:ext>
             </a:extLst>
           </p:cNvPr>
@@ -10209,7 +10217,7 @@
           <p:cNvPr id="5" name="">
             <a:extLst xmlns:a="http://schemas.openxmlformats.org/drawingml/2006/main">
               <a:ext uri="{FF2B5EF4-FFF2-40B4-BE49-F238E27FC236}">
-                <a16:creationId xmlns:a16="http://schemas.microsoft.com/office/drawing/2014/main" id="{74D1B53F-4A13-4DEC-A13F-1FE95074BD15}"/>
+                <a16:creationId xmlns:a16="http://schemas.microsoft.com/office/drawing/2014/main" id="{3AF74705-901B-4782-A67C-7F2CB6BECC98}"/>
               </a:ext>
             </a:extLst>
           </p:cNvPr>
@@ -10266,7 +10274,7 @@
           <p:cNvPr id="6" name="">
             <a:extLst xmlns:a="http://schemas.openxmlformats.org/drawingml/2006/main">
               <a:ext uri="{FF2B5EF4-FFF2-40B4-BE49-F238E27FC236}">
-                <a16:creationId xmlns:a16="http://schemas.microsoft.com/office/drawing/2014/main" id="{0FC99D06-6378-4AD2-8D34-35886D5A882F}"/>
+                <a16:creationId xmlns:a16="http://schemas.microsoft.com/office/drawing/2014/main" id="{4D8B497F-3BC5-406E-B8CF-BEA7E370C255}"/>
               </a:ext>
             </a:extLst>
           </p:cNvPr>
@@ -10323,7 +10331,7 @@
           <p:cNvPr id="7" name="">
             <a:extLst xmlns:a="http://schemas.openxmlformats.org/drawingml/2006/main">
               <a:ext uri="{FF2B5EF4-FFF2-40B4-BE49-F238E27FC236}">
-                <a16:creationId xmlns:a16="http://schemas.microsoft.com/office/drawing/2014/main" id="{032E7A36-22BA-45DD-AD71-48953A8E4945}"/>
+                <a16:creationId xmlns:a16="http://schemas.microsoft.com/office/drawing/2014/main" id="{192164FD-3B97-4956-BD7C-53F992162E01}"/>
               </a:ext>
             </a:extLst>
           </p:cNvPr>
@@ -10355,7 +10363,7 @@
           <p:cNvPr id="8" name="">
             <a:extLst xmlns:a="http://schemas.openxmlformats.org/drawingml/2006/main">
               <a:ext uri="{FF2B5EF4-FFF2-40B4-BE49-F238E27FC236}">
-                <a16:creationId xmlns:a16="http://schemas.microsoft.com/office/drawing/2014/main" id="{299845DB-C102-4C35-868A-1470E97E3EDD}"/>
+                <a16:creationId xmlns:a16="http://schemas.microsoft.com/office/drawing/2014/main" id="{D39143D2-5953-44D9-8742-9488E7EAD81D}"/>
               </a:ext>
             </a:extLst>
           </p:cNvPr>
@@ -10412,7 +10420,7 @@
           <p:cNvPr id="9" name="">
             <a:extLst xmlns:a="http://schemas.openxmlformats.org/drawingml/2006/main">
               <a:ext uri="{FF2B5EF4-FFF2-40B4-BE49-F238E27FC236}">
-                <a16:creationId xmlns:a16="http://schemas.microsoft.com/office/drawing/2014/main" id="{BE882D67-8C80-40FA-B718-39373A312182}"/>
+                <a16:creationId xmlns:a16="http://schemas.microsoft.com/office/drawing/2014/main" id="{1B6CF7C1-D207-497E-8A18-435DDA470521}"/>
               </a:ext>
             </a:extLst>
           </p:cNvPr>
@@ -10469,7 +10477,7 @@
           <p:cNvPr id="10" name="">
             <a:extLst xmlns:a="http://schemas.openxmlformats.org/drawingml/2006/main">
               <a:ext uri="{FF2B5EF4-FFF2-40B4-BE49-F238E27FC236}">
-                <a16:creationId xmlns:a16="http://schemas.microsoft.com/office/drawing/2014/main" id="{AE9E3318-697E-498C-AFA2-27C33E09E35F}"/>
+                <a16:creationId xmlns:a16="http://schemas.microsoft.com/office/drawing/2014/main" id="{7943E93E-F209-43A0-A80A-04FC910CBBF1}"/>
               </a:ext>
             </a:extLst>
           </p:cNvPr>
@@ -10526,7 +10534,7 @@
           <p:cNvPr id="11" name="">
             <a:extLst xmlns:a="http://schemas.openxmlformats.org/drawingml/2006/main">
               <a:ext uri="{FF2B5EF4-FFF2-40B4-BE49-F238E27FC236}">
-                <a16:creationId xmlns:a16="http://schemas.microsoft.com/office/drawing/2014/main" id="{47FC2894-5BAB-426A-9D58-F33797AB5CB0}"/>
+                <a16:creationId xmlns:a16="http://schemas.microsoft.com/office/drawing/2014/main" id="{E520E9B1-4494-4DB3-848C-979ACBA89121}"/>
               </a:ext>
             </a:extLst>
           </p:cNvPr>
@@ -10583,7 +10591,7 @@
           <p:cNvPr id="12" name="">
             <a:extLst xmlns:a="http://schemas.openxmlformats.org/drawingml/2006/main">
               <a:ext uri="{FF2B5EF4-FFF2-40B4-BE49-F238E27FC236}">
-                <a16:creationId xmlns:a16="http://schemas.microsoft.com/office/drawing/2014/main" id="{1A4F3D9C-4474-48AE-AA2A-1369AD53D04E}"/>
+                <a16:creationId xmlns:a16="http://schemas.microsoft.com/office/drawing/2014/main" id="{55B5BF8F-F27E-4199-8E48-E0B538DD7766}"/>
               </a:ext>
             </a:extLst>
           </p:cNvPr>
@@ -10640,7 +10648,7 @@
           <p:cNvPr id="13" name="">
             <a:extLst xmlns:a="http://schemas.openxmlformats.org/drawingml/2006/main">
               <a:ext uri="{FF2B5EF4-FFF2-40B4-BE49-F238E27FC236}">
-                <a16:creationId xmlns:a16="http://schemas.microsoft.com/office/drawing/2014/main" id="{0930CDEB-F05F-4604-AE92-0953792DFAA4}"/>
+                <a16:creationId xmlns:a16="http://schemas.microsoft.com/office/drawing/2014/main" id="{9014B7F0-A86C-4B81-9C6A-0667829E48B4}"/>
               </a:ext>
             </a:extLst>
           </p:cNvPr>
@@ -10697,7 +10705,7 @@
           <p:cNvPr id="14" name="">
             <a:extLst xmlns:a="http://schemas.openxmlformats.org/drawingml/2006/main">
               <a:ext uri="{FF2B5EF4-FFF2-40B4-BE49-F238E27FC236}">
-                <a16:creationId xmlns:a16="http://schemas.microsoft.com/office/drawing/2014/main" id="{73C469CD-9EAA-4932-AE95-606FE4921998}"/>
+                <a16:creationId xmlns:a16="http://schemas.microsoft.com/office/drawing/2014/main" id="{E2518BF5-2929-4208-8562-9ACBF06135A9}"/>
               </a:ext>
             </a:extLst>
           </p:cNvPr>
@@ -10754,7 +10762,7 @@
           <p:cNvPr id="15" name="">
             <a:extLst xmlns:a="http://schemas.openxmlformats.org/drawingml/2006/main">
               <a:ext uri="{FF2B5EF4-FFF2-40B4-BE49-F238E27FC236}">
-                <a16:creationId xmlns:a16="http://schemas.microsoft.com/office/drawing/2014/main" id="{B109E8F2-884E-4D56-B575-58C956C3EFBC}"/>
+                <a16:creationId xmlns:a16="http://schemas.microsoft.com/office/drawing/2014/main" id="{11AFE985-FFC0-4423-8E47-55EE485A8A61}"/>
               </a:ext>
             </a:extLst>
           </p:cNvPr>
@@ -10809,7 +10817,7 @@
     </p:spTree>
     <p:extLst>
       <p:ext uri="{BB962C8B-B14F-4D97-AF65-F5344CB8AC3E}">
-        <p14:creationId xmlns:p14="http://schemas.microsoft.com/office/powerpoint/2010/main" val="1598162091"/>
+        <p14:creationId xmlns:p14="http://schemas.microsoft.com/office/powerpoint/2010/main" val="1747569225"/>
       </p:ext>
     </p:extLst>
   </p:cSld>
@@ -10964,7 +10972,7 @@
           <p:cNvPr id="16" name="">
             <a:extLst xmlns:a="http://schemas.openxmlformats.org/drawingml/2006/main">
               <a:ext uri="{FF2B5EF4-FFF2-40B4-BE49-F238E27FC236}">
-                <a16:creationId xmlns:a16="http://schemas.microsoft.com/office/drawing/2014/main" id="{1EEE3CE6-A3C5-4F78-A289-5ADB5A839CCA}"/>
+                <a16:creationId xmlns:a16="http://schemas.microsoft.com/office/drawing/2014/main" id="{33FF91C8-4E87-49F8-921D-1AB3660A5943}"/>
               </a:ext>
             </a:extLst>
           </p:cNvPr>
@@ -10996,7 +11004,7 @@
           <p:cNvPr id="2" name="">
             <a:extLst xmlns:a="http://schemas.openxmlformats.org/drawingml/2006/main">
               <a:ext uri="{FF2B5EF4-FFF2-40B4-BE49-F238E27FC236}">
-                <a16:creationId xmlns:a16="http://schemas.microsoft.com/office/drawing/2014/main" id="{E7009529-3408-4ACF-A61B-E1AFBD133210}"/>
+                <a16:creationId xmlns:a16="http://schemas.microsoft.com/office/drawing/2014/main" id="{B1461A14-8152-49F9-B255-1C2CC3EB5E63}"/>
               </a:ext>
             </a:extLst>
           </p:cNvPr>
@@ -11053,7 +11061,7 @@
           <p:cNvPr id="3" name="">
             <a:extLst xmlns:a="http://schemas.openxmlformats.org/drawingml/2006/main">
               <a:ext uri="{FF2B5EF4-FFF2-40B4-BE49-F238E27FC236}">
-                <a16:creationId xmlns:a16="http://schemas.microsoft.com/office/drawing/2014/main" id="{C5B30DAE-89D2-409B-902C-643728C1AF06}"/>
+                <a16:creationId xmlns:a16="http://schemas.microsoft.com/office/drawing/2014/main" id="{B5BF348F-23F8-456F-9987-BF8F2BA9D83E}"/>
               </a:ext>
             </a:extLst>
           </p:cNvPr>
@@ -11085,7 +11093,7 @@
           <p:cNvPr id="4" name="">
             <a:extLst xmlns:a="http://schemas.openxmlformats.org/drawingml/2006/main">
               <a:ext uri="{FF2B5EF4-FFF2-40B4-BE49-F238E27FC236}">
-                <a16:creationId xmlns:a16="http://schemas.microsoft.com/office/drawing/2014/main" id="{82443AF2-0DE3-48B1-A7E2-A42D4D31C73E}"/>
+                <a16:creationId xmlns:a16="http://schemas.microsoft.com/office/drawing/2014/main" id="{7D41A824-1FAA-48A8-9D2E-FCDE4509477E}"/>
               </a:ext>
             </a:extLst>
           </p:cNvPr>
@@ -11142,7 +11150,7 @@
           <p:cNvPr id="5" name="">
             <a:extLst xmlns:a="http://schemas.openxmlformats.org/drawingml/2006/main">
               <a:ext uri="{FF2B5EF4-FFF2-40B4-BE49-F238E27FC236}">
-                <a16:creationId xmlns:a16="http://schemas.microsoft.com/office/drawing/2014/main" id="{EF1EA98D-4E4A-4BDD-8B10-950AC78F2C64}"/>
+                <a16:creationId xmlns:a16="http://schemas.microsoft.com/office/drawing/2014/main" id="{C3564A54-B734-4DB2-8BB2-12C693A6DD96}"/>
               </a:ext>
             </a:extLst>
           </p:cNvPr>
@@ -11199,7 +11207,7 @@
           <p:cNvPr id="6" name="">
             <a:extLst xmlns:a="http://schemas.openxmlformats.org/drawingml/2006/main">
               <a:ext uri="{FF2B5EF4-FFF2-40B4-BE49-F238E27FC236}">
-                <a16:creationId xmlns:a16="http://schemas.microsoft.com/office/drawing/2014/main" id="{946F88B0-E25E-407D-8437-08012C9DA17C}"/>
+                <a16:creationId xmlns:a16="http://schemas.microsoft.com/office/drawing/2014/main" id="{1C479603-DD91-4DB4-9A7F-E86514FB8C7F}"/>
               </a:ext>
             </a:extLst>
           </p:cNvPr>
@@ -11256,7 +11264,7 @@
           <p:cNvPr id="7" name="">
             <a:extLst xmlns:a="http://schemas.openxmlformats.org/drawingml/2006/main">
               <a:ext uri="{FF2B5EF4-FFF2-40B4-BE49-F238E27FC236}">
-                <a16:creationId xmlns:a16="http://schemas.microsoft.com/office/drawing/2014/main" id="{F1E1565F-0450-4A7A-A00F-D26078C32ABF}"/>
+                <a16:creationId xmlns:a16="http://schemas.microsoft.com/office/drawing/2014/main" id="{CC617DDB-0290-4F43-BACA-165C82BEAD12}"/>
               </a:ext>
             </a:extLst>
           </p:cNvPr>
@@ -11288,7 +11296,7 @@
           <p:cNvPr id="8" name="">
             <a:extLst xmlns:a="http://schemas.openxmlformats.org/drawingml/2006/main">
               <a:ext uri="{FF2B5EF4-FFF2-40B4-BE49-F238E27FC236}">
-                <a16:creationId xmlns:a16="http://schemas.microsoft.com/office/drawing/2014/main" id="{5CDBBE3F-17B7-47C6-9CE8-F0F078F7E18B}"/>
+                <a16:creationId xmlns:a16="http://schemas.microsoft.com/office/drawing/2014/main" id="{EF4A3087-0142-4FB2-B41B-68ADEC3EA692}"/>
               </a:ext>
             </a:extLst>
           </p:cNvPr>
@@ -11345,7 +11353,7 @@
           <p:cNvPr id="9" name="">
             <a:extLst xmlns:a="http://schemas.openxmlformats.org/drawingml/2006/main">
               <a:ext uri="{FF2B5EF4-FFF2-40B4-BE49-F238E27FC236}">
-                <a16:creationId xmlns:a16="http://schemas.microsoft.com/office/drawing/2014/main" id="{9AB2200C-4DDF-49F3-BA25-00E33CA943D7}"/>
+                <a16:creationId xmlns:a16="http://schemas.microsoft.com/office/drawing/2014/main" id="{E278D209-691D-4E5D-B1BA-06C44BDC944B}"/>
               </a:ext>
             </a:extLst>
           </p:cNvPr>
@@ -11406,7 +11414,7 @@
           <p:nvPr/>
         </p:nvPicPr>
         <p:blipFill>
-          <a:blip xmlns:r="http://schemas.openxmlformats.org/officeDocument/2006/relationships" xmlns:a="http://schemas.openxmlformats.org/drawingml/2006/main" r:embed="R36f56ca78fe54b9f"/>
+          <a:blip xmlns:r="http://schemas.openxmlformats.org/officeDocument/2006/relationships" xmlns:a="http://schemas.openxmlformats.org/drawingml/2006/main" r:embed="Rae1cadbd39554c7e"/>
           <a:stretch xmlns:a="http://schemas.openxmlformats.org/drawingml/2006/main"/>
         </p:blipFill>
         <p:spPr>
@@ -11424,7 +11432,7 @@
           <p:cNvPr id="11" name="">
             <a:extLst xmlns:a="http://schemas.openxmlformats.org/drawingml/2006/main">
               <a:ext uri="{FF2B5EF4-FFF2-40B4-BE49-F238E27FC236}">
-                <a16:creationId xmlns:a16="http://schemas.microsoft.com/office/drawing/2014/main" id="{144C5796-A6CE-4122-95A4-23C382DF05F1}"/>
+                <a16:creationId xmlns:a16="http://schemas.microsoft.com/office/drawing/2014/main" id="{CB220E69-85F1-449D-9964-D1409E90FD33}"/>
               </a:ext>
             </a:extLst>
           </p:cNvPr>
@@ -11481,7 +11489,7 @@
           <p:cNvPr id="12" name="">
             <a:extLst xmlns:a="http://schemas.openxmlformats.org/drawingml/2006/main">
               <a:ext uri="{FF2B5EF4-FFF2-40B4-BE49-F238E27FC236}">
-                <a16:creationId xmlns:a16="http://schemas.microsoft.com/office/drawing/2014/main" id="{59DB013F-92B9-42FA-B669-D686B3EABD0F}"/>
+                <a16:creationId xmlns:a16="http://schemas.microsoft.com/office/drawing/2014/main" id="{5844C984-0FDA-44B6-9111-539A6547D13C}"/>
               </a:ext>
             </a:extLst>
           </p:cNvPr>
@@ -11538,7 +11546,7 @@
           <p:cNvPr id="13" name="">
             <a:extLst xmlns:a="http://schemas.openxmlformats.org/drawingml/2006/main">
               <a:ext uri="{FF2B5EF4-FFF2-40B4-BE49-F238E27FC236}">
-                <a16:creationId xmlns:a16="http://schemas.microsoft.com/office/drawing/2014/main" id="{CE2A3974-B66C-4506-B0E1-A2F65C2143DC}"/>
+                <a16:creationId xmlns:a16="http://schemas.microsoft.com/office/drawing/2014/main" id="{1D0066DD-307C-4A15-8AAF-89BB45CB104D}"/>
               </a:ext>
             </a:extLst>
           </p:cNvPr>
@@ -11570,7 +11578,7 @@
           <p:cNvPr id="14" name="">
             <a:extLst xmlns:a="http://schemas.openxmlformats.org/drawingml/2006/main">
               <a:ext uri="{FF2B5EF4-FFF2-40B4-BE49-F238E27FC236}">
-                <a16:creationId xmlns:a16="http://schemas.microsoft.com/office/drawing/2014/main" id="{695F313E-CBC3-4355-8031-D246E93701C3}"/>
+                <a16:creationId xmlns:a16="http://schemas.microsoft.com/office/drawing/2014/main" id="{6D0E01E7-30FA-4A97-9888-C8A591490209}"/>
               </a:ext>
             </a:extLst>
           </p:cNvPr>
@@ -11627,7 +11635,7 @@
           <p:cNvPr id="15" name="">
             <a:extLst xmlns:a="http://schemas.openxmlformats.org/drawingml/2006/main">
               <a:ext uri="{FF2B5EF4-FFF2-40B4-BE49-F238E27FC236}">
-                <a16:creationId xmlns:a16="http://schemas.microsoft.com/office/drawing/2014/main" id="{50C8DE41-5964-4250-9F85-476A54EAF3CC}"/>
+                <a16:creationId xmlns:a16="http://schemas.microsoft.com/office/drawing/2014/main" id="{69888ECD-DA67-4F72-BDEE-5DF7C0ED89BC}"/>
               </a:ext>
             </a:extLst>
           </p:cNvPr>
@@ -11682,7 +11690,7 @@
     </p:spTree>
     <p:extLst>
       <p:ext uri="{BB962C8B-B14F-4D97-AF65-F5344CB8AC3E}">
-        <p14:creationId xmlns:p14="http://schemas.microsoft.com/office/powerpoint/2010/main" val="1249613577"/>
+        <p14:creationId xmlns:p14="http://schemas.microsoft.com/office/powerpoint/2010/main" val="804555958"/>
       </p:ext>
     </p:extLst>
   </p:cSld>
@@ -11837,7 +11845,7 @@
           <p:cNvPr id="23" name="">
             <a:extLst xmlns:a="http://schemas.openxmlformats.org/drawingml/2006/main">
               <a:ext uri="{FF2B5EF4-FFF2-40B4-BE49-F238E27FC236}">
-                <a16:creationId xmlns:a16="http://schemas.microsoft.com/office/drawing/2014/main" id="{20312237-A71E-4C20-9EA6-04D453A4812A}"/>
+                <a16:creationId xmlns:a16="http://schemas.microsoft.com/office/drawing/2014/main" id="{064E150B-9C17-4E2A-92C6-294A59B57E2D}"/>
               </a:ext>
             </a:extLst>
           </p:cNvPr>
@@ -11869,7 +11877,7 @@
           <p:cNvPr id="2" name="">
             <a:extLst xmlns:a="http://schemas.openxmlformats.org/drawingml/2006/main">
               <a:ext uri="{FF2B5EF4-FFF2-40B4-BE49-F238E27FC236}">
-                <a16:creationId xmlns:a16="http://schemas.microsoft.com/office/drawing/2014/main" id="{A38FB66C-1A36-4050-ACBA-36E8128AC38F}"/>
+                <a16:creationId xmlns:a16="http://schemas.microsoft.com/office/drawing/2014/main" id="{357D0943-DD04-486D-A111-0A6667DB26FA}"/>
               </a:ext>
             </a:extLst>
           </p:cNvPr>
@@ -11926,7 +11934,7 @@
           <p:cNvPr id="3" name="">
             <a:extLst xmlns:a="http://schemas.openxmlformats.org/drawingml/2006/main">
               <a:ext uri="{FF2B5EF4-FFF2-40B4-BE49-F238E27FC236}">
-                <a16:creationId xmlns:a16="http://schemas.microsoft.com/office/drawing/2014/main" id="{F8EA9888-8631-4B1A-B931-39C161FB0F34}"/>
+                <a16:creationId xmlns:a16="http://schemas.microsoft.com/office/drawing/2014/main" id="{EBD938F6-D12E-431F-94F5-9D26A63D2A89}"/>
               </a:ext>
             </a:extLst>
           </p:cNvPr>
@@ -11958,7 +11966,7 @@
           <p:cNvPr id="4" name="">
             <a:extLst xmlns:a="http://schemas.openxmlformats.org/drawingml/2006/main">
               <a:ext uri="{FF2B5EF4-FFF2-40B4-BE49-F238E27FC236}">
-                <a16:creationId xmlns:a16="http://schemas.microsoft.com/office/drawing/2014/main" id="{2A69E3C2-DD74-47DE-94E9-1ABEA9FFC630}"/>
+                <a16:creationId xmlns:a16="http://schemas.microsoft.com/office/drawing/2014/main" id="{E6BDF773-AF52-49A6-96BA-F2A025E47B2F}"/>
               </a:ext>
             </a:extLst>
           </p:cNvPr>
@@ -12015,7 +12023,7 @@
           <p:cNvPr id="5" name="">
             <a:extLst xmlns:a="http://schemas.openxmlformats.org/drawingml/2006/main">
               <a:ext uri="{FF2B5EF4-FFF2-40B4-BE49-F238E27FC236}">
-                <a16:creationId xmlns:a16="http://schemas.microsoft.com/office/drawing/2014/main" id="{959CD6B5-EBEE-491D-AABF-504993CD98AF}"/>
+                <a16:creationId xmlns:a16="http://schemas.microsoft.com/office/drawing/2014/main" id="{0B24E919-5B33-47F1-A8A3-1599E54DF8D8}"/>
               </a:ext>
             </a:extLst>
           </p:cNvPr>
@@ -12072,7 +12080,7 @@
           <p:cNvPr id="6" name="">
             <a:extLst xmlns:a="http://schemas.openxmlformats.org/drawingml/2006/main">
               <a:ext uri="{FF2B5EF4-FFF2-40B4-BE49-F238E27FC236}">
-                <a16:creationId xmlns:a16="http://schemas.microsoft.com/office/drawing/2014/main" id="{3087984C-E886-49B7-8711-684660B1B8DF}"/>
+                <a16:creationId xmlns:a16="http://schemas.microsoft.com/office/drawing/2014/main" id="{A673999B-64C1-4D78-B8EE-E0FC409E8224}"/>
               </a:ext>
             </a:extLst>
           </p:cNvPr>
@@ -12129,7 +12137,7 @@
           <p:cNvPr id="7" name="">
             <a:extLst xmlns:a="http://schemas.openxmlformats.org/drawingml/2006/main">
               <a:ext uri="{FF2B5EF4-FFF2-40B4-BE49-F238E27FC236}">
-                <a16:creationId xmlns:a16="http://schemas.microsoft.com/office/drawing/2014/main" id="{50E31EAE-B572-41FC-B046-79D4FB6E741B}"/>
+                <a16:creationId xmlns:a16="http://schemas.microsoft.com/office/drawing/2014/main" id="{932DE88E-6E46-405C-AA3A-25E217038CA3}"/>
               </a:ext>
             </a:extLst>
           </p:cNvPr>
@@ -12161,7 +12169,7 @@
           <p:cNvPr id="8" name="">
             <a:extLst xmlns:a="http://schemas.openxmlformats.org/drawingml/2006/main">
               <a:ext uri="{FF2B5EF4-FFF2-40B4-BE49-F238E27FC236}">
-                <a16:creationId xmlns:a16="http://schemas.microsoft.com/office/drawing/2014/main" id="{EF8482BD-DB68-4E88-97BF-217BF49D7F50}"/>
+                <a16:creationId xmlns:a16="http://schemas.microsoft.com/office/drawing/2014/main" id="{6744B518-B398-464F-BE2D-EB53128EAA69}"/>
               </a:ext>
             </a:extLst>
           </p:cNvPr>
@@ -12218,7 +12226,7 @@
           <p:cNvPr id="9" name="">
             <a:extLst xmlns:a="http://schemas.openxmlformats.org/drawingml/2006/main">
               <a:ext uri="{FF2B5EF4-FFF2-40B4-BE49-F238E27FC236}">
-                <a16:creationId xmlns:a16="http://schemas.microsoft.com/office/drawing/2014/main" id="{D765C0FF-BA3F-4595-9FC5-8D76605FC8EC}"/>
+                <a16:creationId xmlns:a16="http://schemas.microsoft.com/office/drawing/2014/main" id="{86AE5588-D904-4074-99D6-86F0F698BB7D}"/>
               </a:ext>
             </a:extLst>
           </p:cNvPr>
@@ -12275,7 +12283,7 @@
           <p:cNvPr id="10" name="">
             <a:extLst xmlns:a="http://schemas.openxmlformats.org/drawingml/2006/main">
               <a:ext uri="{FF2B5EF4-FFF2-40B4-BE49-F238E27FC236}">
-                <a16:creationId xmlns:a16="http://schemas.microsoft.com/office/drawing/2014/main" id="{6C1C805D-C78A-4AFD-BF32-1B677955D83B}"/>
+                <a16:creationId xmlns:a16="http://schemas.microsoft.com/office/drawing/2014/main" id="{7BCD881A-0F86-42F6-B5C5-7F0B92A1C5AE}"/>
               </a:ext>
             </a:extLst>
           </p:cNvPr>
@@ -12309,7 +12317,7 @@
           <p:cNvPr id="11" name="">
             <a:extLst xmlns:a="http://schemas.openxmlformats.org/drawingml/2006/main">
               <a:ext uri="{FF2B5EF4-FFF2-40B4-BE49-F238E27FC236}">
-                <a16:creationId xmlns:a16="http://schemas.microsoft.com/office/drawing/2014/main" id="{7FF046B4-22D7-4F23-A721-C9CC3E6D4F84}"/>
+                <a16:creationId xmlns:a16="http://schemas.microsoft.com/office/drawing/2014/main" id="{0A1F8F3C-0937-4CCC-8225-187FADFB2A0D}"/>
               </a:ext>
             </a:extLst>
           </p:cNvPr>
@@ -12341,7 +12349,7 @@
           <p:cNvPr id="12" name="">
             <a:extLst xmlns:a="http://schemas.openxmlformats.org/drawingml/2006/main">
               <a:ext uri="{FF2B5EF4-FFF2-40B4-BE49-F238E27FC236}">
-                <a16:creationId xmlns:a16="http://schemas.microsoft.com/office/drawing/2014/main" id="{EA20AFFA-52E1-4339-8E2B-D0D5C6401370}"/>
+                <a16:creationId xmlns:a16="http://schemas.microsoft.com/office/drawing/2014/main" id="{B62889A6-6A31-4FBF-BA5D-5B4C6A11DD19}"/>
               </a:ext>
             </a:extLst>
           </p:cNvPr>
@@ -12398,7 +12406,7 @@
           <p:cNvPr id="13" name="">
             <a:extLst xmlns:a="http://schemas.openxmlformats.org/drawingml/2006/main">
               <a:ext uri="{FF2B5EF4-FFF2-40B4-BE49-F238E27FC236}">
-                <a16:creationId xmlns:a16="http://schemas.microsoft.com/office/drawing/2014/main" id="{53CC6EAD-EF13-4D2A-9C29-133295D489C5}"/>
+                <a16:creationId xmlns:a16="http://schemas.microsoft.com/office/drawing/2014/main" id="{1ADB205E-BB8D-48AD-90F3-455700BE85DA}"/>
               </a:ext>
             </a:extLst>
           </p:cNvPr>
@@ -12455,7 +12463,7 @@
           <p:cNvPr id="14" name="">
             <a:extLst xmlns:a="http://schemas.openxmlformats.org/drawingml/2006/main">
               <a:ext uri="{FF2B5EF4-FFF2-40B4-BE49-F238E27FC236}">
-                <a16:creationId xmlns:a16="http://schemas.microsoft.com/office/drawing/2014/main" id="{5358FF39-B3CB-4DBA-AFAD-06A94692B3B1}"/>
+                <a16:creationId xmlns:a16="http://schemas.microsoft.com/office/drawing/2014/main" id="{C8253DA7-0F1D-4946-A87D-AA53BA7517E5}"/>
               </a:ext>
             </a:extLst>
           </p:cNvPr>
@@ -12489,7 +12497,7 @@
           <p:cNvPr id="15" name="">
             <a:extLst xmlns:a="http://schemas.openxmlformats.org/drawingml/2006/main">
               <a:ext uri="{FF2B5EF4-FFF2-40B4-BE49-F238E27FC236}">
-                <a16:creationId xmlns:a16="http://schemas.microsoft.com/office/drawing/2014/main" id="{056D2480-06B5-460D-8CE5-5675B00D90A2}"/>
+                <a16:creationId xmlns:a16="http://schemas.microsoft.com/office/drawing/2014/main" id="{C0252F4D-1487-4F95-8794-F8F3A56F83BF}"/>
               </a:ext>
             </a:extLst>
           </p:cNvPr>
@@ -12521,7 +12529,7 @@
           <p:cNvPr id="16" name="">
             <a:extLst xmlns:a="http://schemas.openxmlformats.org/drawingml/2006/main">
               <a:ext uri="{FF2B5EF4-FFF2-40B4-BE49-F238E27FC236}">
-                <a16:creationId xmlns:a16="http://schemas.microsoft.com/office/drawing/2014/main" id="{FEB36CB8-956F-44D1-B7B5-899C39C9C451}"/>
+                <a16:creationId xmlns:a16="http://schemas.microsoft.com/office/drawing/2014/main" id="{37ABC9DB-C913-45DF-B8BD-18C1DE343F97}"/>
               </a:ext>
             </a:extLst>
           </p:cNvPr>
@@ -12578,7 +12586,7 @@
           <p:cNvPr id="17" name="">
             <a:extLst xmlns:a="http://schemas.openxmlformats.org/drawingml/2006/main">
               <a:ext uri="{FF2B5EF4-FFF2-40B4-BE49-F238E27FC236}">
-                <a16:creationId xmlns:a16="http://schemas.microsoft.com/office/drawing/2014/main" id="{1CEA8C3A-62C2-4CFC-9620-37A1B9FB1951}"/>
+                <a16:creationId xmlns:a16="http://schemas.microsoft.com/office/drawing/2014/main" id="{A709965D-7EBE-4927-8AFC-AEF8C51AB69B}"/>
               </a:ext>
             </a:extLst>
           </p:cNvPr>
@@ -12635,7 +12643,7 @@
           <p:cNvPr id="18" name="">
             <a:extLst xmlns:a="http://schemas.openxmlformats.org/drawingml/2006/main">
               <a:ext uri="{FF2B5EF4-FFF2-40B4-BE49-F238E27FC236}">
-                <a16:creationId xmlns:a16="http://schemas.microsoft.com/office/drawing/2014/main" id="{8CF5A83B-FA9E-4374-8781-DA02BB737C79}"/>
+                <a16:creationId xmlns:a16="http://schemas.microsoft.com/office/drawing/2014/main" id="{3CE58523-8022-4A99-A119-C1A0B6BB1553}"/>
               </a:ext>
             </a:extLst>
           </p:cNvPr>
@@ -12669,7 +12677,7 @@
           <p:cNvPr id="19" name="">
             <a:extLst xmlns:a="http://schemas.openxmlformats.org/drawingml/2006/main">
               <a:ext uri="{FF2B5EF4-FFF2-40B4-BE49-F238E27FC236}">
-                <a16:creationId xmlns:a16="http://schemas.microsoft.com/office/drawing/2014/main" id="{460AE34D-7ECF-4422-8220-B8CC480D31D3}"/>
+                <a16:creationId xmlns:a16="http://schemas.microsoft.com/office/drawing/2014/main" id="{CF614E2E-71C9-4DC8-BC9B-B557D63428B0}"/>
               </a:ext>
             </a:extLst>
           </p:cNvPr>
@@ -12701,7 +12709,7 @@
           <p:cNvPr id="20" name="">
             <a:extLst xmlns:a="http://schemas.openxmlformats.org/drawingml/2006/main">
               <a:ext uri="{FF2B5EF4-FFF2-40B4-BE49-F238E27FC236}">
-                <a16:creationId xmlns:a16="http://schemas.microsoft.com/office/drawing/2014/main" id="{6D3DE478-233C-448A-945F-7F83A27A490C}"/>
+                <a16:creationId xmlns:a16="http://schemas.microsoft.com/office/drawing/2014/main" id="{E836CFE1-93F7-45D3-AF75-A5AF0380F4E8}"/>
               </a:ext>
             </a:extLst>
           </p:cNvPr>
@@ -12758,7 +12766,7 @@
           <p:cNvPr id="21" name="">
             <a:extLst xmlns:a="http://schemas.openxmlformats.org/drawingml/2006/main">
               <a:ext uri="{FF2B5EF4-FFF2-40B4-BE49-F238E27FC236}">
-                <a16:creationId xmlns:a16="http://schemas.microsoft.com/office/drawing/2014/main" id="{1316A397-22DD-4DC7-972E-B279FD69FECE}"/>
+                <a16:creationId xmlns:a16="http://schemas.microsoft.com/office/drawing/2014/main" id="{CAF61BE7-AB60-4CA8-8DB3-ABAB43647E2F}"/>
               </a:ext>
             </a:extLst>
           </p:cNvPr>
@@ -12815,7 +12823,7 @@
           <p:cNvPr id="22" name="">
             <a:extLst xmlns:a="http://schemas.openxmlformats.org/drawingml/2006/main">
               <a:ext uri="{FF2B5EF4-FFF2-40B4-BE49-F238E27FC236}">
-                <a16:creationId xmlns:a16="http://schemas.microsoft.com/office/drawing/2014/main" id="{24E92294-848C-4415-A1AD-965AF54D95C3}"/>
+                <a16:creationId xmlns:a16="http://schemas.microsoft.com/office/drawing/2014/main" id="{EA13DD5F-4CDA-4B63-91B7-4AB2E083D3AC}"/>
               </a:ext>
             </a:extLst>
           </p:cNvPr>
@@ -12870,7 +12878,7 @@
     </p:spTree>
     <p:extLst>
       <p:ext uri="{BB962C8B-B14F-4D97-AF65-F5344CB8AC3E}">
-        <p14:creationId xmlns:p14="http://schemas.microsoft.com/office/powerpoint/2010/main" val="363620353"/>
+        <p14:creationId xmlns:p14="http://schemas.microsoft.com/office/powerpoint/2010/main" val="1075934223"/>
       </p:ext>
     </p:extLst>
   </p:cSld>
@@ -13071,7 +13079,7 @@
           <p:cNvPr id="22" name="">
             <a:extLst xmlns:a="http://schemas.openxmlformats.org/drawingml/2006/main">
               <a:ext uri="{FF2B5EF4-FFF2-40B4-BE49-F238E27FC236}">
-                <a16:creationId xmlns:a16="http://schemas.microsoft.com/office/drawing/2014/main" id="{2B157B50-4A3F-4211-BEE7-3C39C1AC2577}"/>
+                <a16:creationId xmlns:a16="http://schemas.microsoft.com/office/drawing/2014/main" id="{3A21AF8A-376A-425A-809A-9DAB3F1D923E}"/>
               </a:ext>
             </a:extLst>
           </p:cNvPr>
@@ -13103,7 +13111,7 @@
           <p:cNvPr id="2" name="">
             <a:extLst xmlns:a="http://schemas.openxmlformats.org/drawingml/2006/main">
               <a:ext uri="{FF2B5EF4-FFF2-40B4-BE49-F238E27FC236}">
-                <a16:creationId xmlns:a16="http://schemas.microsoft.com/office/drawing/2014/main" id="{1F2466D5-3375-464B-9E82-FAB26BE9C119}"/>
+                <a16:creationId xmlns:a16="http://schemas.microsoft.com/office/drawing/2014/main" id="{B84BC3C3-87F8-40F6-9D8D-E7A3A7E93416}"/>
               </a:ext>
             </a:extLst>
           </p:cNvPr>
@@ -13160,7 +13168,7 @@
           <p:cNvPr id="3" name="">
             <a:extLst xmlns:a="http://schemas.openxmlformats.org/drawingml/2006/main">
               <a:ext uri="{FF2B5EF4-FFF2-40B4-BE49-F238E27FC236}">
-                <a16:creationId xmlns:a16="http://schemas.microsoft.com/office/drawing/2014/main" id="{0F59CF7E-1333-44D3-81ED-FA01A38322A4}"/>
+                <a16:creationId xmlns:a16="http://schemas.microsoft.com/office/drawing/2014/main" id="{8D110551-03D3-454B-BE2A-1DA271D9A609}"/>
               </a:ext>
             </a:extLst>
           </p:cNvPr>
@@ -13192,7 +13200,7 @@
           <p:cNvPr id="4" name="">
             <a:extLst xmlns:a="http://schemas.openxmlformats.org/drawingml/2006/main">
               <a:ext uri="{FF2B5EF4-FFF2-40B4-BE49-F238E27FC236}">
-                <a16:creationId xmlns:a16="http://schemas.microsoft.com/office/drawing/2014/main" id="{45CEB531-AEAF-48F9-93EC-FC4A8D373D86}"/>
+                <a16:creationId xmlns:a16="http://schemas.microsoft.com/office/drawing/2014/main" id="{D4FA325B-2A99-432D-869A-1961A9E9555F}"/>
               </a:ext>
             </a:extLst>
           </p:cNvPr>
@@ -13249,7 +13257,7 @@
           <p:cNvPr id="5" name="">
             <a:extLst xmlns:a="http://schemas.openxmlformats.org/drawingml/2006/main">
               <a:ext uri="{FF2B5EF4-FFF2-40B4-BE49-F238E27FC236}">
-                <a16:creationId xmlns:a16="http://schemas.microsoft.com/office/drawing/2014/main" id="{BA500557-A11E-41AF-BD31-A5BC27E28ACD}"/>
+                <a16:creationId xmlns:a16="http://schemas.microsoft.com/office/drawing/2014/main" id="{472F9024-3591-4822-9AB9-970884D7297B}"/>
               </a:ext>
             </a:extLst>
           </p:cNvPr>
@@ -13306,7 +13314,7 @@
           <p:cNvPr id="6" name="">
             <a:extLst xmlns:a="http://schemas.openxmlformats.org/drawingml/2006/main">
               <a:ext uri="{FF2B5EF4-FFF2-40B4-BE49-F238E27FC236}">
-                <a16:creationId xmlns:a16="http://schemas.microsoft.com/office/drawing/2014/main" id="{D11B60D8-C324-45FC-9E4A-7C35D08CCB31}"/>
+                <a16:creationId xmlns:a16="http://schemas.microsoft.com/office/drawing/2014/main" id="{6E220078-1248-44EA-827A-B6C5B6B8669D}"/>
               </a:ext>
             </a:extLst>
           </p:cNvPr>
@@ -13363,7 +13371,7 @@
           <p:cNvPr id="7" name="">
             <a:extLst xmlns:a="http://schemas.openxmlformats.org/drawingml/2006/main">
               <a:ext uri="{FF2B5EF4-FFF2-40B4-BE49-F238E27FC236}">
-                <a16:creationId xmlns:a16="http://schemas.microsoft.com/office/drawing/2014/main" id="{B671B9A7-C07F-4459-A4D5-08752737DD79}"/>
+                <a16:creationId xmlns:a16="http://schemas.microsoft.com/office/drawing/2014/main" id="{6E996477-55EB-4ED1-9532-BB796C6E1057}"/>
               </a:ext>
             </a:extLst>
           </p:cNvPr>
@@ -13395,7 +13403,7 @@
           <p:cNvPr id="8" name="">
             <a:extLst xmlns:a="http://schemas.openxmlformats.org/drawingml/2006/main">
               <a:ext uri="{FF2B5EF4-FFF2-40B4-BE49-F238E27FC236}">
-                <a16:creationId xmlns:a16="http://schemas.microsoft.com/office/drawing/2014/main" id="{6535F845-141F-40FF-86AD-A5693B9AEA6B}"/>
+                <a16:creationId xmlns:a16="http://schemas.microsoft.com/office/drawing/2014/main" id="{250AB00E-EA83-4DDD-8FE3-C18D0B51752B}"/>
               </a:ext>
             </a:extLst>
           </p:cNvPr>
@@ -13452,7 +13460,7 @@
           <p:cNvPr id="9" name="">
             <a:extLst xmlns:a="http://schemas.openxmlformats.org/drawingml/2006/main">
               <a:ext uri="{FF2B5EF4-FFF2-40B4-BE49-F238E27FC236}">
-                <a16:creationId xmlns:a16="http://schemas.microsoft.com/office/drawing/2014/main" id="{FDABB014-107B-43FA-814D-C4BD7FE4CFC1}"/>
+                <a16:creationId xmlns:a16="http://schemas.microsoft.com/office/drawing/2014/main" id="{0208B52E-9249-463B-AAD9-8D92957348B1}"/>
               </a:ext>
             </a:extLst>
           </p:cNvPr>
@@ -13509,7 +13517,7 @@
           <p:cNvPr id="10" name="">
             <a:extLst xmlns:a="http://schemas.openxmlformats.org/drawingml/2006/main">
               <a:ext uri="{FF2B5EF4-FFF2-40B4-BE49-F238E27FC236}">
-                <a16:creationId xmlns:a16="http://schemas.microsoft.com/office/drawing/2014/main" id="{B87D8466-DD95-4EC6-B9FE-8EEDD493B9E9}"/>
+                <a16:creationId xmlns:a16="http://schemas.microsoft.com/office/drawing/2014/main" id="{E54C9B6A-C21E-4AAB-B1DA-29168724309E}"/>
               </a:ext>
             </a:extLst>
           </p:cNvPr>
@@ -13543,7 +13551,7 @@
           <p:cNvPr id="11" name="">
             <a:extLst xmlns:a="http://schemas.openxmlformats.org/drawingml/2006/main">
               <a:ext uri="{FF2B5EF4-FFF2-40B4-BE49-F238E27FC236}">
-                <a16:creationId xmlns:a16="http://schemas.microsoft.com/office/drawing/2014/main" id="{A7B7B510-C3AC-4BEA-AF9A-82618964C540}"/>
+                <a16:creationId xmlns:a16="http://schemas.microsoft.com/office/drawing/2014/main" id="{EEA2EF28-F909-4D54-9742-715DDC99A52A}"/>
               </a:ext>
             </a:extLst>
           </p:cNvPr>
@@ -13575,7 +13583,7 @@
           <p:cNvPr id="12" name="">
             <a:extLst xmlns:a="http://schemas.openxmlformats.org/drawingml/2006/main">
               <a:ext uri="{FF2B5EF4-FFF2-40B4-BE49-F238E27FC236}">
-                <a16:creationId xmlns:a16="http://schemas.microsoft.com/office/drawing/2014/main" id="{CA1CC155-8F7D-4A6C-A105-08BC941CE3A1}"/>
+                <a16:creationId xmlns:a16="http://schemas.microsoft.com/office/drawing/2014/main" id="{08804BF4-738B-42C3-A95A-2E63C1BE56D7}"/>
               </a:ext>
             </a:extLst>
           </p:cNvPr>
@@ -13632,7 +13640,7 @@
           <p:cNvPr id="13" name="">
             <a:extLst xmlns:a="http://schemas.openxmlformats.org/drawingml/2006/main">
               <a:ext uri="{FF2B5EF4-FFF2-40B4-BE49-F238E27FC236}">
-                <a16:creationId xmlns:a16="http://schemas.microsoft.com/office/drawing/2014/main" id="{CAD5F24B-5972-436C-A1BE-69256B586EE4}"/>
+                <a16:creationId xmlns:a16="http://schemas.microsoft.com/office/drawing/2014/main" id="{4B0C378B-9C6E-43F5-9183-A9DE8DDE285E}"/>
               </a:ext>
             </a:extLst>
           </p:cNvPr>
@@ -13689,7 +13697,7 @@
           <p:cNvPr id="14" name="">
             <a:extLst xmlns:a="http://schemas.openxmlformats.org/drawingml/2006/main">
               <a:ext uri="{FF2B5EF4-FFF2-40B4-BE49-F238E27FC236}">
-                <a16:creationId xmlns:a16="http://schemas.microsoft.com/office/drawing/2014/main" id="{2E772A49-2273-4C4C-8301-E52ED64CC9F6}"/>
+                <a16:creationId xmlns:a16="http://schemas.microsoft.com/office/drawing/2014/main" id="{1849E18B-A4C5-4322-B147-D0E10219381A}"/>
               </a:ext>
             </a:extLst>
           </p:cNvPr>
@@ -13723,7 +13731,7 @@
           <p:cNvPr id="15" name="">
             <a:extLst xmlns:a="http://schemas.openxmlformats.org/drawingml/2006/main">
               <a:ext uri="{FF2B5EF4-FFF2-40B4-BE49-F238E27FC236}">
-                <a16:creationId xmlns:a16="http://schemas.microsoft.com/office/drawing/2014/main" id="{7D42A78F-A6EF-412A-93C5-E79B0CEEF7A5}"/>
+                <a16:creationId xmlns:a16="http://schemas.microsoft.com/office/drawing/2014/main" id="{67737082-6B14-48A0-ACBA-E47CC6A7B80A}"/>
               </a:ext>
             </a:extLst>
           </p:cNvPr>
@@ -13755,7 +13763,7 @@
           <p:cNvPr id="16" name="">
             <a:extLst xmlns:a="http://schemas.openxmlformats.org/drawingml/2006/main">
               <a:ext uri="{FF2B5EF4-FFF2-40B4-BE49-F238E27FC236}">
-                <a16:creationId xmlns:a16="http://schemas.microsoft.com/office/drawing/2014/main" id="{4838E596-AEF1-401B-8CF0-FD86BC65B911}"/>
+                <a16:creationId xmlns:a16="http://schemas.microsoft.com/office/drawing/2014/main" id="{61F6AEAD-DF65-4140-853E-1FF659CBD300}"/>
               </a:ext>
             </a:extLst>
           </p:cNvPr>
@@ -13812,7 +13820,7 @@
           <p:cNvPr id="17" name="">
             <a:extLst xmlns:a="http://schemas.openxmlformats.org/drawingml/2006/main">
               <a:ext uri="{FF2B5EF4-FFF2-40B4-BE49-F238E27FC236}">
-                <a16:creationId xmlns:a16="http://schemas.microsoft.com/office/drawing/2014/main" id="{40A5D078-F635-4407-A658-2DDFEC493C8D}"/>
+                <a16:creationId xmlns:a16="http://schemas.microsoft.com/office/drawing/2014/main" id="{B5128C1A-CEB8-47B3-92DC-3B7F7577CAA6}"/>
               </a:ext>
             </a:extLst>
           </p:cNvPr>
@@ -13869,7 +13877,7 @@
           <p:cNvPr id="18" name="">
             <a:extLst xmlns:a="http://schemas.openxmlformats.org/drawingml/2006/main">
               <a:ext uri="{FF2B5EF4-FFF2-40B4-BE49-F238E27FC236}">
-                <a16:creationId xmlns:a16="http://schemas.microsoft.com/office/drawing/2014/main" id="{A59DF6D0-4F99-41C6-BEEE-B13D140E8950}"/>
+                <a16:creationId xmlns:a16="http://schemas.microsoft.com/office/drawing/2014/main" id="{04EBC803-EFF6-423A-AF02-323A50FFB4E2}"/>
               </a:ext>
             </a:extLst>
           </p:cNvPr>
@@ -13903,7 +13911,7 @@
           <p:cNvPr id="19" name="">
             <a:extLst xmlns:a="http://schemas.openxmlformats.org/drawingml/2006/main">
               <a:ext uri="{FF2B5EF4-FFF2-40B4-BE49-F238E27FC236}">
-                <a16:creationId xmlns:a16="http://schemas.microsoft.com/office/drawing/2014/main" id="{BBE63F5E-3255-4A67-B80E-0C67387DFAC7}"/>
+                <a16:creationId xmlns:a16="http://schemas.microsoft.com/office/drawing/2014/main" id="{E6707B71-6792-4BE5-9787-9EC76D563D41}"/>
               </a:ext>
             </a:extLst>
           </p:cNvPr>
@@ -13935,7 +13943,7 @@
           <p:cNvPr id="20" name="">
             <a:extLst xmlns:a="http://schemas.openxmlformats.org/drawingml/2006/main">
               <a:ext uri="{FF2B5EF4-FFF2-40B4-BE49-F238E27FC236}">
-                <a16:creationId xmlns:a16="http://schemas.microsoft.com/office/drawing/2014/main" id="{38130A01-0532-4482-BF4B-777EC8CCB8F6}"/>
+                <a16:creationId xmlns:a16="http://schemas.microsoft.com/office/drawing/2014/main" id="{7DEFFC2C-0B84-4966-8DF9-A0A4AB414E3D}"/>
               </a:ext>
             </a:extLst>
           </p:cNvPr>
@@ -13992,7 +14000,7 @@
           <p:cNvPr id="21" name="">
             <a:extLst xmlns:a="http://schemas.openxmlformats.org/drawingml/2006/main">
               <a:ext uri="{FF2B5EF4-FFF2-40B4-BE49-F238E27FC236}">
-                <a16:creationId xmlns:a16="http://schemas.microsoft.com/office/drawing/2014/main" id="{3AC3E0BF-AFF2-4229-8E82-3D97DFBE974D}"/>
+                <a16:creationId xmlns:a16="http://schemas.microsoft.com/office/drawing/2014/main" id="{CA641E3A-FA36-4808-94B8-571C39DEF553}"/>
               </a:ext>
             </a:extLst>
           </p:cNvPr>
@@ -14047,7 +14055,7 @@
     </p:spTree>
     <p:extLst>
       <p:ext uri="{BB962C8B-B14F-4D97-AF65-F5344CB8AC3E}">
-        <p14:creationId xmlns:p14="http://schemas.microsoft.com/office/powerpoint/2010/main" val="1886725982"/>
+        <p14:creationId xmlns:p14="http://schemas.microsoft.com/office/powerpoint/2010/main" val="1143399255"/>
       </p:ext>
     </p:extLst>
   </p:cSld>
